--- a/testcases/charts-multilevel.pptx
+++ b/testcases/charts-multilevel.pptx
@@ -260,7 +260,7 @@
           </c:val>
           <c:extLst>
             <c:ext xmlns:c16="http://schemas.microsoft.com/office/drawing/2014/chart" uri="{C3380CC4-5D6E-409C-BE32-E72D297353CC}">
-              <c16:uniqueId val="{00000000-E16A-436A-89CA-31983FB22438}"/>
+              <c16:uniqueId val="{00000000-A2A5-4FC1-AC18-A194F787F874}"/>
             </c:ext>
           </c:extLst>
         </c:ser>
@@ -274,11 +274,11 @@
         </c:dLbls>
         <c:gapWidth val="219"/>
         <c:overlap val="-27"/>
-        <c:axId val="195995040"/>
-        <c:axId val="195989280"/>
+        <c:axId val="1385473488"/>
+        <c:axId val="1385470608"/>
       </c:barChart>
       <c:catAx>
-        <c:axId val="195995040"/>
+        <c:axId val="1385473488"/>
         <c:scaling>
           <c:orientation val="minMax"/>
         </c:scaling>
@@ -321,7 +321,7 @@
             <a:endParaRPr lang="zh-CN"/>
           </a:p>
         </c:txPr>
-        <c:crossAx val="195989280"/>
+        <c:crossAx val="1385470608"/>
         <c:crosses val="autoZero"/>
         <c:auto val="1"/>
         <c:lblAlgn val="ctr"/>
@@ -329,7 +329,7 @@
         <c:noMultiLvlLbl val="0"/>
       </c:catAx>
       <c:valAx>
-        <c:axId val="195989280"/>
+        <c:axId val="1385470608"/>
         <c:scaling>
           <c:orientation val="minMax"/>
         </c:scaling>
@@ -380,7 +380,7 @@
             <a:endParaRPr lang="zh-CN"/>
           </a:p>
         </c:txPr>
-        <c:crossAx val="195995040"/>
+        <c:crossAx val="1385473488"/>
         <c:crosses val="autoZero"/>
         <c:crossBetween val="between"/>
       </c:valAx>
@@ -587,7 +587,7 @@
           </c:val>
           <c:extLst>
             <c:ext xmlns:c16="http://schemas.microsoft.com/office/drawing/2014/chart" uri="{C3380CC4-5D6E-409C-BE32-E72D297353CC}">
-              <c16:uniqueId val="{00000000-CB06-4755-A994-3387B8F024AE}"/>
+              <c16:uniqueId val="{00000000-6D01-45C9-AC3E-A7250FBFC490}"/>
             </c:ext>
           </c:extLst>
         </c:ser>
@@ -601,11 +601,11 @@
         </c:dLbls>
         <c:gapWidth val="219"/>
         <c:overlap val="-27"/>
-        <c:axId val="342124432"/>
-        <c:axId val="342123472"/>
+        <c:axId val="1385406272"/>
+        <c:axId val="1385403392"/>
       </c:barChart>
       <c:catAx>
-        <c:axId val="342124432"/>
+        <c:axId val="1385406272"/>
         <c:scaling>
           <c:orientation val="minMax"/>
         </c:scaling>
@@ -648,7 +648,7 @@
             <a:endParaRPr lang="zh-CN"/>
           </a:p>
         </c:txPr>
-        <c:crossAx val="342123472"/>
+        <c:crossAx val="1385403392"/>
         <c:crosses val="autoZero"/>
         <c:auto val="1"/>
         <c:lblAlgn val="ctr"/>
@@ -656,7 +656,7 @@
         <c:noMultiLvlLbl val="0"/>
       </c:catAx>
       <c:valAx>
-        <c:axId val="342123472"/>
+        <c:axId val="1385403392"/>
         <c:scaling>
           <c:orientation val="minMax"/>
         </c:scaling>
@@ -707,7 +707,7 @@
             <a:endParaRPr lang="zh-CN"/>
           </a:p>
         </c:txPr>
-        <c:crossAx val="342124432"/>
+        <c:crossAx val="1385406272"/>
         <c:crosses val="autoZero"/>
         <c:crossBetween val="between"/>
       </c:valAx>
@@ -865,7 +865,7 @@
           <c:smooth val="0"/>
           <c:extLst>
             <c:ext xmlns:c16="http://schemas.microsoft.com/office/drawing/2014/chart" uri="{C3380CC4-5D6E-409C-BE32-E72D297353CC}">
-              <c16:uniqueId val="{00000000-BD3D-40B2-9DBE-444E89E623F4}"/>
+              <c16:uniqueId val="{00000000-0DB9-47F1-B53B-2E02D26729F9}"/>
             </c:ext>
           </c:extLst>
         </c:ser>
@@ -878,11 +878,11 @@
           <c:showBubbleSize val="0"/>
         </c:dLbls>
         <c:smooth val="0"/>
-        <c:axId val="606355887"/>
-        <c:axId val="606353487"/>
+        <c:axId val="1385438608"/>
+        <c:axId val="1385437168"/>
       </c:lineChart>
       <c:catAx>
-        <c:axId val="606355887"/>
+        <c:axId val="1385438608"/>
         <c:scaling>
           <c:orientation val="minMax"/>
         </c:scaling>
@@ -925,7 +925,7 @@
             <a:endParaRPr lang="zh-CN"/>
           </a:p>
         </c:txPr>
-        <c:crossAx val="606353487"/>
+        <c:crossAx val="1385437168"/>
         <c:crosses val="autoZero"/>
         <c:auto val="1"/>
         <c:lblAlgn val="ctr"/>
@@ -933,7 +933,7 @@
         <c:noMultiLvlLbl val="0"/>
       </c:catAx>
       <c:valAx>
-        <c:axId val="606353487"/>
+        <c:axId val="1385437168"/>
         <c:scaling>
           <c:orientation val="minMax"/>
         </c:scaling>
@@ -984,7 +984,282 @@
             <a:endParaRPr lang="zh-CN"/>
           </a:p>
         </c:txPr>
-        <c:crossAx val="606355887"/>
+        <c:crossAx val="1385438608"/>
+        <c:crosses val="autoZero"/>
+        <c:crossBetween val="between"/>
+      </c:valAx>
+      <c:spPr>
+        <a:noFill/>
+        <a:ln>
+          <a:noFill/>
+        </a:ln>
+        <a:effectLst/>
+      </c:spPr>
+    </c:plotArea>
+    <c:plotVisOnly val="1"/>
+    <c:dispBlanksAs val="gap"/>
+    <c:extLst>
+      <c:ext xmlns:c16r3="http://schemas.microsoft.com/office/drawing/2017/03/chart" uri="{56B9EC1D-385E-4148-901F-78D8002777C0}">
+        <c16r3:dataDisplayOptions16>
+          <c16r3:dispNaAsBlank val="1"/>
+        </c16r3:dataDisplayOptions16>
+      </c:ext>
+    </c:extLst>
+    <c:showDLblsOverMax val="0"/>
+  </c:chart>
+  <c:spPr>
+    <a:noFill/>
+    <a:ln>
+      <a:noFill/>
+    </a:ln>
+    <a:effectLst/>
+  </c:spPr>
+  <c:txPr>
+    <a:bodyPr/>
+    <a:lstStyle/>
+    <a:p>
+      <a:pPr>
+        <a:defRPr/>
+      </a:pPr>
+      <a:endParaRPr lang="zh-CN"/>
+    </a:p>
+  </c:txPr>
+  <c:externalData r:id="rId3">
+    <c:autoUpdate val="0"/>
+  </c:externalData>
+</c:chartSpace>
+</file>
+
+<file path=ppt/charts/chart4.xml><?xml version="1.0" encoding="utf-8"?>
+<c:chartSpace xmlns:c="http://schemas.openxmlformats.org/drawingml/2006/chart" xmlns:a="http://schemas.openxmlformats.org/drawingml/2006/main" xmlns:r="http://schemas.openxmlformats.org/officeDocument/2006/relationships" xmlns:c16r2="http://schemas.microsoft.com/office/drawing/2015/06/chart">
+  <c:date1904 val="0"/>
+  <c:lang val="zh-CN"/>
+  <c:roundedCorners val="0"/>
+  <mc:AlternateContent xmlns:mc="http://schemas.openxmlformats.org/markup-compatibility/2006">
+    <mc:Choice xmlns:c14="http://schemas.microsoft.com/office/drawing/2007/8/2/chart" Requires="c14">
+      <c14:style val="102"/>
+    </mc:Choice>
+    <mc:Fallback>
+      <c:style val="2"/>
+    </mc:Fallback>
+  </mc:AlternateContent>
+  <c:chart>
+    <c:autoTitleDeleted val="0"/>
+    <c:plotArea>
+      <c:layout/>
+      <c:barChart>
+        <c:barDir val="bar"/>
+        <c:grouping val="clustered"/>
+        <c:varyColors val="0"/>
+        <c:ser>
+          <c:idx val="0"/>
+          <c:order val="0"/>
+          <c:tx>
+            <c:strRef>
+              <c:f>Sheet1!$C$1</c:f>
+              <c:strCache>
+                <c:ptCount val="1"/>
+                <c:pt idx="0">
+                  <c:v>系列 1</c:v>
+                </c:pt>
+              </c:strCache>
+            </c:strRef>
+          </c:tx>
+          <c:spPr>
+            <a:solidFill>
+              <a:schemeClr val="accent1"/>
+            </a:solidFill>
+            <a:ln>
+              <a:noFill/>
+            </a:ln>
+            <a:effectLst/>
+          </c:spPr>
+          <c:invertIfNegative val="0"/>
+          <c:cat>
+            <c:multiLvlStrRef>
+              <c:f>Sheet1!$A$2:$B$7</c:f>
+              <c:multiLvlStrCache>
+                <c:ptCount val="6"/>
+                <c:lvl>
+                  <c:pt idx="0">
+                    <c:v>东城</c:v>
+                  </c:pt>
+                  <c:pt idx="1">
+                    <c:v>西城</c:v>
+                  </c:pt>
+                  <c:pt idx="2">
+                    <c:v>南城</c:v>
+                  </c:pt>
+                  <c:pt idx="3">
+                    <c:v>东城</c:v>
+                  </c:pt>
+                  <c:pt idx="4">
+                    <c:v>西城</c:v>
+                  </c:pt>
+                  <c:pt idx="5">
+                    <c:v>南城</c:v>
+                  </c:pt>
+                </c:lvl>
+                <c:lvl>
+                  <c:pt idx="0">
+                    <c:v>甲区</c:v>
+                  </c:pt>
+                  <c:pt idx="3">
+                    <c:v>乙区</c:v>
+                  </c:pt>
+                </c:lvl>
+              </c:multiLvlStrCache>
+            </c:multiLvlStrRef>
+          </c:cat>
+          <c:val>
+            <c:numRef>
+              <c:f>Sheet1!$C$2:$C$7</c:f>
+              <c:numCache>
+                <c:formatCode>General</c:formatCode>
+                <c:ptCount val="6"/>
+                <c:pt idx="0">
+                  <c:v>2</c:v>
+                </c:pt>
+                <c:pt idx="1">
+                  <c:v>5</c:v>
+                </c:pt>
+                <c:pt idx="2">
+                  <c:v>4</c:v>
+                </c:pt>
+                <c:pt idx="3">
+                  <c:v>3</c:v>
+                </c:pt>
+                <c:pt idx="4">
+                  <c:v>2</c:v>
+                </c:pt>
+                <c:pt idx="5">
+                  <c:v>5</c:v>
+                </c:pt>
+              </c:numCache>
+            </c:numRef>
+          </c:val>
+          <c:extLst>
+            <c:ext xmlns:c16="http://schemas.microsoft.com/office/drawing/2014/chart" uri="{C3380CC4-5D6E-409C-BE32-E72D297353CC}">
+              <c16:uniqueId val="{00000000-F64B-47C0-A74D-1C6A9287994F}"/>
+            </c:ext>
+          </c:extLst>
+        </c:ser>
+        <c:dLbls>
+          <c:showLegendKey val="0"/>
+          <c:showVal val="0"/>
+          <c:showCatName val="0"/>
+          <c:showSerName val="0"/>
+          <c:showPercent val="0"/>
+          <c:showBubbleSize val="0"/>
+        </c:dLbls>
+        <c:gapWidth val="182"/>
+        <c:axId val="1385411120"/>
+        <c:axId val="1385411600"/>
+      </c:barChart>
+      <c:catAx>
+        <c:axId val="1385411120"/>
+        <c:scaling>
+          <c:orientation val="minMax"/>
+        </c:scaling>
+        <c:delete val="0"/>
+        <c:axPos val="l"/>
+        <c:numFmt formatCode="General" sourceLinked="1"/>
+        <c:majorTickMark val="none"/>
+        <c:minorTickMark val="none"/>
+        <c:tickLblPos val="nextTo"/>
+        <c:spPr>
+          <a:noFill/>
+          <a:ln w="9525" cap="flat" cmpd="sng" algn="ctr">
+            <a:solidFill>
+              <a:schemeClr val="tx1">
+                <a:lumMod val="15000"/>
+                <a:lumOff val="85000"/>
+              </a:schemeClr>
+            </a:solidFill>
+            <a:round/>
+          </a:ln>
+          <a:effectLst/>
+        </c:spPr>
+        <c:txPr>
+          <a:bodyPr rot="-60000000" spcFirstLastPara="1" vertOverflow="ellipsis" vert="horz" wrap="square" anchor="ctr" anchorCtr="1"/>
+          <a:lstStyle/>
+          <a:p>
+            <a:pPr>
+              <a:defRPr sz="1197" b="0" i="0" u="none" strike="noStrike" kern="1200" baseline="0">
+                <a:solidFill>
+                  <a:schemeClr val="tx1">
+                    <a:lumMod val="65000"/>
+                    <a:lumOff val="35000"/>
+                  </a:schemeClr>
+                </a:solidFill>
+                <a:latin typeface="+mn-lt"/>
+                <a:ea typeface="+mn-ea"/>
+                <a:cs typeface="+mn-cs"/>
+              </a:defRPr>
+            </a:pPr>
+            <a:endParaRPr lang="zh-CN"/>
+          </a:p>
+        </c:txPr>
+        <c:crossAx val="1385411600"/>
+        <c:crosses val="autoZero"/>
+        <c:auto val="1"/>
+        <c:lblAlgn val="ctr"/>
+        <c:lblOffset val="100"/>
+        <c:noMultiLvlLbl val="0"/>
+      </c:catAx>
+      <c:valAx>
+        <c:axId val="1385411600"/>
+        <c:scaling>
+          <c:orientation val="minMax"/>
+        </c:scaling>
+        <c:delete val="0"/>
+        <c:axPos val="b"/>
+        <c:majorGridlines>
+          <c:spPr>
+            <a:ln w="9525" cap="flat" cmpd="sng" algn="ctr">
+              <a:solidFill>
+                <a:schemeClr val="tx1">
+                  <a:lumMod val="15000"/>
+                  <a:lumOff val="85000"/>
+                </a:schemeClr>
+              </a:solidFill>
+              <a:round/>
+            </a:ln>
+            <a:effectLst/>
+          </c:spPr>
+        </c:majorGridlines>
+        <c:numFmt formatCode="General" sourceLinked="1"/>
+        <c:majorTickMark val="none"/>
+        <c:minorTickMark val="none"/>
+        <c:tickLblPos val="nextTo"/>
+        <c:spPr>
+          <a:noFill/>
+          <a:ln>
+            <a:noFill/>
+          </a:ln>
+          <a:effectLst/>
+        </c:spPr>
+        <c:txPr>
+          <a:bodyPr rot="-60000000" spcFirstLastPara="1" vertOverflow="ellipsis" vert="horz" wrap="square" anchor="ctr" anchorCtr="1"/>
+          <a:lstStyle/>
+          <a:p>
+            <a:pPr>
+              <a:defRPr sz="1197" b="0" i="0" u="none" strike="noStrike" kern="1200" baseline="0">
+                <a:solidFill>
+                  <a:schemeClr val="tx1">
+                    <a:lumMod val="65000"/>
+                    <a:lumOff val="35000"/>
+                  </a:schemeClr>
+                </a:solidFill>
+                <a:latin typeface="+mn-lt"/>
+                <a:ea typeface="+mn-ea"/>
+                <a:cs typeface="+mn-cs"/>
+              </a:defRPr>
+            </a:pPr>
+            <a:endParaRPr lang="zh-CN"/>
+          </a:p>
+        </c:txPr>
+        <c:crossAx val="1385411120"/>
         <c:crosses val="autoZero"/>
         <c:crossBetween val="between"/>
       </c:valAx>
@@ -1150,6 +1425,46 @@
 </cs:colorStyle>
 </file>
 
+<file path=ppt/charts/colors4.xml><?xml version="1.0" encoding="utf-8"?>
+<cs:colorStyle xmlns:cs="http://schemas.microsoft.com/office/drawing/2012/chartStyle" xmlns:a="http://schemas.openxmlformats.org/drawingml/2006/main" meth="cycle" id="10">
+  <a:schemeClr val="accent1"/>
+  <a:schemeClr val="accent2"/>
+  <a:schemeClr val="accent3"/>
+  <a:schemeClr val="accent4"/>
+  <a:schemeClr val="accent5"/>
+  <a:schemeClr val="accent6"/>
+  <cs:variation/>
+  <cs:variation>
+    <a:lumMod val="60000"/>
+  </cs:variation>
+  <cs:variation>
+    <a:lumMod val="80000"/>
+    <a:lumOff val="20000"/>
+  </cs:variation>
+  <cs:variation>
+    <a:lumMod val="80000"/>
+  </cs:variation>
+  <cs:variation>
+    <a:lumMod val="60000"/>
+    <a:lumOff val="40000"/>
+  </cs:variation>
+  <cs:variation>
+    <a:lumMod val="50000"/>
+  </cs:variation>
+  <cs:variation>
+    <a:lumMod val="70000"/>
+    <a:lumOff val="30000"/>
+  </cs:variation>
+  <cs:variation>
+    <a:lumMod val="70000"/>
+  </cs:variation>
+  <cs:variation>
+    <a:lumMod val="50000"/>
+    <a:lumOff val="50000"/>
+  </cs:variation>
+</cs:colorStyle>
+</file>
+
 <file path=ppt/charts/style1.xml><?xml version="1.0" encoding="utf-8"?>
 <cs:chartStyle xmlns:cs="http://schemas.microsoft.com/office/drawing/2012/chartStyle" xmlns:a="http://schemas.openxmlformats.org/drawingml/2006/main" id="201">
   <cs:axisTitle>
@@ -2640,6 +2955,511 @@
             <a:lumOff val="85000"/>
           </a:schemeClr>
         </a:solidFill>
+      </a:ln>
+    </cs:spPr>
+  </cs:upBar>
+  <cs:valueAxis>
+    <cs:lnRef idx="0"/>
+    <cs:fillRef idx="0"/>
+    <cs:effectRef idx="0"/>
+    <cs:fontRef idx="minor">
+      <a:schemeClr val="tx1">
+        <a:lumMod val="65000"/>
+        <a:lumOff val="35000"/>
+      </a:schemeClr>
+    </cs:fontRef>
+    <cs:defRPr sz="1197" kern="1200"/>
+  </cs:valueAxis>
+  <cs:wall>
+    <cs:lnRef idx="0"/>
+    <cs:fillRef idx="0"/>
+    <cs:effectRef idx="0"/>
+    <cs:fontRef idx="minor">
+      <a:schemeClr val="tx1"/>
+    </cs:fontRef>
+    <cs:spPr>
+      <a:noFill/>
+      <a:ln>
+        <a:noFill/>
+      </a:ln>
+    </cs:spPr>
+  </cs:wall>
+</cs:chartStyle>
+</file>
+
+<file path=ppt/charts/style4.xml><?xml version="1.0" encoding="utf-8"?>
+<cs:chartStyle xmlns:cs="http://schemas.microsoft.com/office/drawing/2012/chartStyle" xmlns:a="http://schemas.openxmlformats.org/drawingml/2006/main" id="216">
+  <cs:axisTitle>
+    <cs:lnRef idx="0"/>
+    <cs:fillRef idx="0"/>
+    <cs:effectRef idx="0"/>
+    <cs:fontRef idx="minor">
+      <a:schemeClr val="tx1">
+        <a:lumMod val="65000"/>
+        <a:lumOff val="35000"/>
+      </a:schemeClr>
+    </cs:fontRef>
+    <cs:defRPr sz="1330" kern="1200"/>
+  </cs:axisTitle>
+  <cs:categoryAxis>
+    <cs:lnRef idx="0"/>
+    <cs:fillRef idx="0"/>
+    <cs:effectRef idx="0"/>
+    <cs:fontRef idx="minor">
+      <a:schemeClr val="tx1">
+        <a:lumMod val="65000"/>
+        <a:lumOff val="35000"/>
+      </a:schemeClr>
+    </cs:fontRef>
+    <cs:spPr>
+      <a:ln w="9525" cap="flat" cmpd="sng" algn="ctr">
+        <a:solidFill>
+          <a:schemeClr val="tx1">
+            <a:lumMod val="15000"/>
+            <a:lumOff val="85000"/>
+          </a:schemeClr>
+        </a:solidFill>
+        <a:round/>
+      </a:ln>
+    </cs:spPr>
+    <cs:defRPr sz="1197" kern="1200"/>
+  </cs:categoryAxis>
+  <cs:chartArea mods="allowNoFillOverride allowNoLineOverride">
+    <cs:lnRef idx="0"/>
+    <cs:fillRef idx="0"/>
+    <cs:effectRef idx="0"/>
+    <cs:fontRef idx="minor">
+      <a:schemeClr val="tx1"/>
+    </cs:fontRef>
+    <cs:spPr>
+      <a:solidFill>
+        <a:schemeClr val="bg1"/>
+      </a:solidFill>
+      <a:ln w="9525" cap="flat" cmpd="sng" algn="ctr">
+        <a:solidFill>
+          <a:schemeClr val="tx1">
+            <a:lumMod val="15000"/>
+            <a:lumOff val="85000"/>
+          </a:schemeClr>
+        </a:solidFill>
+        <a:round/>
+      </a:ln>
+    </cs:spPr>
+    <cs:defRPr sz="1330" kern="1200"/>
+  </cs:chartArea>
+  <cs:dataLabel>
+    <cs:lnRef idx="0"/>
+    <cs:fillRef idx="0"/>
+    <cs:effectRef idx="0"/>
+    <cs:fontRef idx="minor">
+      <a:schemeClr val="tx1">
+        <a:lumMod val="75000"/>
+        <a:lumOff val="25000"/>
+      </a:schemeClr>
+    </cs:fontRef>
+    <cs:defRPr sz="1197" kern="1200"/>
+  </cs:dataLabel>
+  <cs:dataLabelCallout>
+    <cs:lnRef idx="0"/>
+    <cs:fillRef idx="0"/>
+    <cs:effectRef idx="0"/>
+    <cs:fontRef idx="minor">
+      <a:schemeClr val="dk1">
+        <a:lumMod val="65000"/>
+        <a:lumOff val="35000"/>
+      </a:schemeClr>
+    </cs:fontRef>
+    <cs:spPr>
+      <a:solidFill>
+        <a:schemeClr val="lt1"/>
+      </a:solidFill>
+      <a:ln>
+        <a:solidFill>
+          <a:schemeClr val="dk1">
+            <a:lumMod val="25000"/>
+            <a:lumOff val="75000"/>
+          </a:schemeClr>
+        </a:solidFill>
+      </a:ln>
+    </cs:spPr>
+    <cs:defRPr sz="1197" kern="1200"/>
+    <cs:bodyPr rot="0" spcFirstLastPara="1" vertOverflow="clip" horzOverflow="clip" vert="horz" wrap="square" lIns="36576" tIns="18288" rIns="36576" bIns="18288" anchor="ctr" anchorCtr="1">
+      <a:spAutoFit/>
+    </cs:bodyPr>
+  </cs:dataLabelCallout>
+  <cs:dataPoint>
+    <cs:lnRef idx="0"/>
+    <cs:fillRef idx="1">
+      <cs:styleClr val="auto"/>
+    </cs:fillRef>
+    <cs:effectRef idx="0"/>
+    <cs:fontRef idx="minor">
+      <a:schemeClr val="tx1"/>
+    </cs:fontRef>
+  </cs:dataPoint>
+  <cs:dataPoint3D>
+    <cs:lnRef idx="0"/>
+    <cs:fillRef idx="1">
+      <cs:styleClr val="auto"/>
+    </cs:fillRef>
+    <cs:effectRef idx="0"/>
+    <cs:fontRef idx="minor">
+      <a:schemeClr val="tx1"/>
+    </cs:fontRef>
+  </cs:dataPoint3D>
+  <cs:dataPointLine>
+    <cs:lnRef idx="0">
+      <cs:styleClr val="auto"/>
+    </cs:lnRef>
+    <cs:fillRef idx="1"/>
+    <cs:effectRef idx="0"/>
+    <cs:fontRef idx="minor">
+      <a:schemeClr val="tx1"/>
+    </cs:fontRef>
+    <cs:spPr>
+      <a:ln w="28575" cap="rnd">
+        <a:solidFill>
+          <a:schemeClr val="phClr"/>
+        </a:solidFill>
+        <a:round/>
+      </a:ln>
+    </cs:spPr>
+  </cs:dataPointLine>
+  <cs:dataPointMarker>
+    <cs:lnRef idx="0">
+      <cs:styleClr val="auto"/>
+    </cs:lnRef>
+    <cs:fillRef idx="1">
+      <cs:styleClr val="auto"/>
+    </cs:fillRef>
+    <cs:effectRef idx="0"/>
+    <cs:fontRef idx="minor">
+      <a:schemeClr val="tx1"/>
+    </cs:fontRef>
+    <cs:spPr>
+      <a:ln w="9525">
+        <a:solidFill>
+          <a:schemeClr val="phClr"/>
+        </a:solidFill>
+      </a:ln>
+    </cs:spPr>
+  </cs:dataPointMarker>
+  <cs:dataPointMarkerLayout symbol="circle" size="5"/>
+  <cs:dataPointWireframe>
+    <cs:lnRef idx="0">
+      <cs:styleClr val="auto"/>
+    </cs:lnRef>
+    <cs:fillRef idx="1"/>
+    <cs:effectRef idx="0"/>
+    <cs:fontRef idx="minor">
+      <a:schemeClr val="tx1"/>
+    </cs:fontRef>
+    <cs:spPr>
+      <a:ln w="9525" cap="rnd">
+        <a:solidFill>
+          <a:schemeClr val="phClr"/>
+        </a:solidFill>
+        <a:round/>
+      </a:ln>
+    </cs:spPr>
+  </cs:dataPointWireframe>
+  <cs:dataTable>
+    <cs:lnRef idx="0"/>
+    <cs:fillRef idx="0"/>
+    <cs:effectRef idx="0"/>
+    <cs:fontRef idx="minor">
+      <a:schemeClr val="tx1">
+        <a:lumMod val="65000"/>
+        <a:lumOff val="35000"/>
+      </a:schemeClr>
+    </cs:fontRef>
+    <cs:spPr>
+      <a:noFill/>
+      <a:ln w="9525" cap="flat" cmpd="sng" algn="ctr">
+        <a:solidFill>
+          <a:schemeClr val="tx1">
+            <a:lumMod val="15000"/>
+            <a:lumOff val="85000"/>
+          </a:schemeClr>
+        </a:solidFill>
+        <a:round/>
+      </a:ln>
+    </cs:spPr>
+    <cs:defRPr sz="1197" kern="1200"/>
+  </cs:dataTable>
+  <cs:downBar>
+    <cs:lnRef idx="0"/>
+    <cs:fillRef idx="0"/>
+    <cs:effectRef idx="0"/>
+    <cs:fontRef idx="minor">
+      <a:schemeClr val="tx1"/>
+    </cs:fontRef>
+    <cs:spPr>
+      <a:solidFill>
+        <a:schemeClr val="dk1">
+          <a:lumMod val="75000"/>
+          <a:lumOff val="25000"/>
+        </a:schemeClr>
+      </a:solidFill>
+      <a:ln w="9525" cap="flat" cmpd="sng" algn="ctr">
+        <a:solidFill>
+          <a:schemeClr val="tx1">
+            <a:lumMod val="65000"/>
+            <a:lumOff val="35000"/>
+          </a:schemeClr>
+        </a:solidFill>
+        <a:round/>
+      </a:ln>
+    </cs:spPr>
+  </cs:downBar>
+  <cs:dropLine>
+    <cs:lnRef idx="0"/>
+    <cs:fillRef idx="0"/>
+    <cs:effectRef idx="0"/>
+    <cs:fontRef idx="minor">
+      <a:schemeClr val="tx1"/>
+    </cs:fontRef>
+    <cs:spPr>
+      <a:ln w="9525" cap="flat" cmpd="sng" algn="ctr">
+        <a:solidFill>
+          <a:schemeClr val="tx1">
+            <a:lumMod val="35000"/>
+            <a:lumOff val="65000"/>
+          </a:schemeClr>
+        </a:solidFill>
+        <a:round/>
+      </a:ln>
+    </cs:spPr>
+  </cs:dropLine>
+  <cs:errorBar>
+    <cs:lnRef idx="0"/>
+    <cs:fillRef idx="0"/>
+    <cs:effectRef idx="0"/>
+    <cs:fontRef idx="minor">
+      <a:schemeClr val="tx1"/>
+    </cs:fontRef>
+    <cs:spPr>
+      <a:ln w="9525" cap="flat" cmpd="sng" algn="ctr">
+        <a:solidFill>
+          <a:schemeClr val="tx1">
+            <a:lumMod val="65000"/>
+            <a:lumOff val="35000"/>
+          </a:schemeClr>
+        </a:solidFill>
+        <a:round/>
+      </a:ln>
+    </cs:spPr>
+  </cs:errorBar>
+  <cs:floor>
+    <cs:lnRef idx="0"/>
+    <cs:fillRef idx="0"/>
+    <cs:effectRef idx="0"/>
+    <cs:fontRef idx="minor">
+      <a:schemeClr val="tx1"/>
+    </cs:fontRef>
+    <cs:spPr>
+      <a:noFill/>
+      <a:ln>
+        <a:noFill/>
+      </a:ln>
+    </cs:spPr>
+  </cs:floor>
+  <cs:gridlineMajor>
+    <cs:lnRef idx="0"/>
+    <cs:fillRef idx="0"/>
+    <cs:effectRef idx="0"/>
+    <cs:fontRef idx="minor">
+      <a:schemeClr val="tx1"/>
+    </cs:fontRef>
+    <cs:spPr>
+      <a:ln w="9525" cap="flat" cmpd="sng" algn="ctr">
+        <a:solidFill>
+          <a:schemeClr val="tx1">
+            <a:lumMod val="15000"/>
+            <a:lumOff val="85000"/>
+          </a:schemeClr>
+        </a:solidFill>
+        <a:round/>
+      </a:ln>
+    </cs:spPr>
+  </cs:gridlineMajor>
+  <cs:gridlineMinor>
+    <cs:lnRef idx="0"/>
+    <cs:fillRef idx="0"/>
+    <cs:effectRef idx="0"/>
+    <cs:fontRef idx="minor">
+      <a:schemeClr val="tx1"/>
+    </cs:fontRef>
+    <cs:spPr>
+      <a:ln w="9525" cap="flat" cmpd="sng" algn="ctr">
+        <a:solidFill>
+          <a:schemeClr val="tx1">
+            <a:lumMod val="5000"/>
+            <a:lumOff val="95000"/>
+          </a:schemeClr>
+        </a:solidFill>
+        <a:round/>
+      </a:ln>
+    </cs:spPr>
+  </cs:gridlineMinor>
+  <cs:hiLoLine>
+    <cs:lnRef idx="0"/>
+    <cs:fillRef idx="0"/>
+    <cs:effectRef idx="0"/>
+    <cs:fontRef idx="minor">
+      <a:schemeClr val="tx1"/>
+    </cs:fontRef>
+    <cs:spPr>
+      <a:ln w="9525" cap="flat" cmpd="sng" algn="ctr">
+        <a:solidFill>
+          <a:schemeClr val="tx1">
+            <a:lumMod val="50000"/>
+            <a:lumOff val="50000"/>
+          </a:schemeClr>
+        </a:solidFill>
+        <a:round/>
+      </a:ln>
+    </cs:spPr>
+  </cs:hiLoLine>
+  <cs:leaderLine>
+    <cs:lnRef idx="0"/>
+    <cs:fillRef idx="0"/>
+    <cs:effectRef idx="0"/>
+    <cs:fontRef idx="minor">
+      <a:schemeClr val="tx1"/>
+    </cs:fontRef>
+    <cs:spPr>
+      <a:ln w="9525" cap="flat" cmpd="sng" algn="ctr">
+        <a:solidFill>
+          <a:schemeClr val="tx1">
+            <a:lumMod val="35000"/>
+            <a:lumOff val="65000"/>
+          </a:schemeClr>
+        </a:solidFill>
+        <a:round/>
+      </a:ln>
+    </cs:spPr>
+  </cs:leaderLine>
+  <cs:legend>
+    <cs:lnRef idx="0"/>
+    <cs:fillRef idx="0"/>
+    <cs:effectRef idx="0"/>
+    <cs:fontRef idx="minor">
+      <a:schemeClr val="tx1">
+        <a:lumMod val="65000"/>
+        <a:lumOff val="35000"/>
+      </a:schemeClr>
+    </cs:fontRef>
+    <cs:defRPr sz="1197" kern="1200"/>
+  </cs:legend>
+  <cs:plotArea mods="allowNoFillOverride allowNoLineOverride">
+    <cs:lnRef idx="0"/>
+    <cs:fillRef idx="0"/>
+    <cs:effectRef idx="0"/>
+    <cs:fontRef idx="minor">
+      <a:schemeClr val="tx1"/>
+    </cs:fontRef>
+  </cs:plotArea>
+  <cs:plotArea3D mods="allowNoFillOverride allowNoLineOverride">
+    <cs:lnRef idx="0"/>
+    <cs:fillRef idx="0"/>
+    <cs:effectRef idx="0"/>
+    <cs:fontRef idx="minor">
+      <a:schemeClr val="tx1"/>
+    </cs:fontRef>
+  </cs:plotArea3D>
+  <cs:seriesAxis>
+    <cs:lnRef idx="0"/>
+    <cs:fillRef idx="0"/>
+    <cs:effectRef idx="0"/>
+    <cs:fontRef idx="minor">
+      <a:schemeClr val="tx1">
+        <a:lumMod val="65000"/>
+        <a:lumOff val="35000"/>
+      </a:schemeClr>
+    </cs:fontRef>
+    <cs:defRPr sz="1197" kern="1200"/>
+  </cs:seriesAxis>
+  <cs:seriesLine>
+    <cs:lnRef idx="0"/>
+    <cs:fillRef idx="0"/>
+    <cs:effectRef idx="0"/>
+    <cs:fontRef idx="minor">
+      <a:schemeClr val="tx1"/>
+    </cs:fontRef>
+    <cs:spPr>
+      <a:ln w="9525" cap="flat" cmpd="sng" algn="ctr">
+        <a:solidFill>
+          <a:schemeClr val="tx1">
+            <a:lumMod val="35000"/>
+            <a:lumOff val="65000"/>
+          </a:schemeClr>
+        </a:solidFill>
+        <a:round/>
+      </a:ln>
+    </cs:spPr>
+  </cs:seriesLine>
+  <cs:title>
+    <cs:lnRef idx="0"/>
+    <cs:fillRef idx="0"/>
+    <cs:effectRef idx="0"/>
+    <cs:fontRef idx="minor">
+      <a:schemeClr val="tx1">
+        <a:lumMod val="65000"/>
+        <a:lumOff val="35000"/>
+      </a:schemeClr>
+    </cs:fontRef>
+    <cs:defRPr sz="1862" b="0" kern="1200" spc="0" baseline="0"/>
+  </cs:title>
+  <cs:trendline>
+    <cs:lnRef idx="0">
+      <cs:styleClr val="auto"/>
+    </cs:lnRef>
+    <cs:fillRef idx="0"/>
+    <cs:effectRef idx="0"/>
+    <cs:fontRef idx="minor">
+      <a:schemeClr val="tx1"/>
+    </cs:fontRef>
+    <cs:spPr>
+      <a:ln w="19050" cap="rnd">
+        <a:solidFill>
+          <a:schemeClr val="phClr"/>
+        </a:solidFill>
+        <a:prstDash val="sysDot"/>
+      </a:ln>
+    </cs:spPr>
+  </cs:trendline>
+  <cs:trendlineLabel>
+    <cs:lnRef idx="0"/>
+    <cs:fillRef idx="0"/>
+    <cs:effectRef idx="0"/>
+    <cs:fontRef idx="minor">
+      <a:schemeClr val="tx1">
+        <a:lumMod val="65000"/>
+        <a:lumOff val="35000"/>
+      </a:schemeClr>
+    </cs:fontRef>
+    <cs:defRPr sz="1197" kern="1200"/>
+  </cs:trendlineLabel>
+  <cs:upBar>
+    <cs:lnRef idx="0"/>
+    <cs:fillRef idx="0"/>
+    <cs:effectRef idx="0"/>
+    <cs:fontRef idx="minor">
+      <a:schemeClr val="tx1"/>
+    </cs:fontRef>
+    <cs:spPr>
+      <a:solidFill>
+        <a:schemeClr val="lt1"/>
+      </a:solidFill>
+      <a:ln w="9525" cap="flat" cmpd="sng" algn="ctr">
+        <a:solidFill>
+          <a:schemeClr val="tx1">
+            <a:lumMod val="65000"/>
+            <a:lumOff val="35000"/>
+          </a:schemeClr>
+        </a:solidFill>
+        <a:round/>
       </a:ln>
     </cs:spPr>
   </cs:upBar>
@@ -2694,7 +3514,7 @@
           <p:cNvPr id="2" name="标题 1">
             <a:extLst>
               <a:ext uri="{FF2B5EF4-FFF2-40B4-BE49-F238E27FC236}">
-                <a16:creationId xmlns:a16="http://schemas.microsoft.com/office/drawing/2014/main" id="{FB47ED88-30D0-2FA2-850E-A6620CA0D0CF}"/>
+                <a16:creationId xmlns:a16="http://schemas.microsoft.com/office/drawing/2014/main" id="{4138DC04-17ED-FCCE-E9A5-9EF1CD7CB00D}"/>
               </a:ext>
             </a:extLst>
           </p:cNvPr>
@@ -2731,7 +3551,7 @@
           <p:cNvPr id="3" name="副标题 2">
             <a:extLst>
               <a:ext uri="{FF2B5EF4-FFF2-40B4-BE49-F238E27FC236}">
-                <a16:creationId xmlns:a16="http://schemas.microsoft.com/office/drawing/2014/main" id="{62AED944-4777-B660-6DAB-B0220D1990D7}"/>
+                <a16:creationId xmlns:a16="http://schemas.microsoft.com/office/drawing/2014/main" id="{812851FB-3BAF-84F1-12FE-291A8878447C}"/>
               </a:ext>
             </a:extLst>
           </p:cNvPr>
@@ -2801,7 +3621,7 @@
           <p:cNvPr id="4" name="日期占位符 3">
             <a:extLst>
               <a:ext uri="{FF2B5EF4-FFF2-40B4-BE49-F238E27FC236}">
-                <a16:creationId xmlns:a16="http://schemas.microsoft.com/office/drawing/2014/main" id="{209E7C1F-266A-49D9-016C-BC8A49B8BA75}"/>
+                <a16:creationId xmlns:a16="http://schemas.microsoft.com/office/drawing/2014/main" id="{0246EF7C-F7E0-7A34-9B00-42F81C0F8598}"/>
               </a:ext>
             </a:extLst>
           </p:cNvPr>
@@ -2817,7 +3637,7 @@
           <a:bodyPr/>
           <a:lstStyle/>
           <a:p>
-            <a:fld id="{4E062528-7899-4F1E-B4FB-AE19E5049ACE}" type="datetimeFigureOut">
+            <a:fld id="{FF776401-529C-4520-90C9-EC11B46F0E46}" type="datetimeFigureOut">
               <a:rPr lang="zh-CN" altLang="en-US" smtClean="0"/>
               <a:t>2026/10/14</a:t>
             </a:fld>
@@ -2830,7 +3650,7 @@
           <p:cNvPr id="5" name="页脚占位符 4">
             <a:extLst>
               <a:ext uri="{FF2B5EF4-FFF2-40B4-BE49-F238E27FC236}">
-                <a16:creationId xmlns:a16="http://schemas.microsoft.com/office/drawing/2014/main" id="{3E4B6C6F-7EF3-86E1-8459-1C906287C600}"/>
+                <a16:creationId xmlns:a16="http://schemas.microsoft.com/office/drawing/2014/main" id="{A319A79A-C684-3FBC-D3BA-076C3C40B728}"/>
               </a:ext>
             </a:extLst>
           </p:cNvPr>
@@ -2855,7 +3675,7 @@
           <p:cNvPr id="6" name="灯片编号占位符 5">
             <a:extLst>
               <a:ext uri="{FF2B5EF4-FFF2-40B4-BE49-F238E27FC236}">
-                <a16:creationId xmlns:a16="http://schemas.microsoft.com/office/drawing/2014/main" id="{B506C9D3-3E4E-BED6-5674-9DC8CA73645D}"/>
+                <a16:creationId xmlns:a16="http://schemas.microsoft.com/office/drawing/2014/main" id="{23624040-7662-0AC7-B3BB-1DDE5E4A2D6D}"/>
               </a:ext>
             </a:extLst>
           </p:cNvPr>
@@ -2871,7 +3691,7 @@
           <a:bodyPr/>
           <a:lstStyle/>
           <a:p>
-            <a:fld id="{4B81E475-45AC-43A4-AC6E-22A7646F7618}" type="slidenum">
+            <a:fld id="{B7212D74-26B5-4FE8-B9EB-895A007E4038}" type="slidenum">
               <a:rPr lang="zh-CN" altLang="en-US" smtClean="0"/>
               <a:t>‹#›</a:t>
             </a:fld>
@@ -2882,7 +3702,7 @@
     </p:spTree>
     <p:extLst>
       <p:ext uri="{BB962C8B-B14F-4D97-AF65-F5344CB8AC3E}">
-        <p14:creationId xmlns:p14="http://schemas.microsoft.com/office/powerpoint/2010/main" val="1481495271"/>
+        <p14:creationId xmlns:p14="http://schemas.microsoft.com/office/powerpoint/2010/main" val="1587769436"/>
       </p:ext>
     </p:extLst>
   </p:cSld>
@@ -2914,7 +3734,7 @@
           <p:cNvPr id="2" name="标题 1">
             <a:extLst>
               <a:ext uri="{FF2B5EF4-FFF2-40B4-BE49-F238E27FC236}">
-                <a16:creationId xmlns:a16="http://schemas.microsoft.com/office/drawing/2014/main" id="{E68F0188-5604-E019-64CF-41C190A71E20}"/>
+                <a16:creationId xmlns:a16="http://schemas.microsoft.com/office/drawing/2014/main" id="{0EA91B62-5CBB-2018-9125-33406916034D}"/>
               </a:ext>
             </a:extLst>
           </p:cNvPr>
@@ -2942,7 +3762,7 @@
           <p:cNvPr id="3" name="竖排文字占位符 2">
             <a:extLst>
               <a:ext uri="{FF2B5EF4-FFF2-40B4-BE49-F238E27FC236}">
-                <a16:creationId xmlns:a16="http://schemas.microsoft.com/office/drawing/2014/main" id="{A4031E4E-6EEE-90A7-3B71-681C8FB4A2C9}"/>
+                <a16:creationId xmlns:a16="http://schemas.microsoft.com/office/drawing/2014/main" id="{ADD58796-4036-54D8-23F8-A3BEBF7A9517}"/>
               </a:ext>
             </a:extLst>
           </p:cNvPr>
@@ -2999,7 +3819,7 @@
           <p:cNvPr id="4" name="日期占位符 3">
             <a:extLst>
               <a:ext uri="{FF2B5EF4-FFF2-40B4-BE49-F238E27FC236}">
-                <a16:creationId xmlns:a16="http://schemas.microsoft.com/office/drawing/2014/main" id="{18108F72-6ACD-2D04-5E50-B8FFE158772F}"/>
+                <a16:creationId xmlns:a16="http://schemas.microsoft.com/office/drawing/2014/main" id="{E66A848E-E777-CFA3-BF63-D4BB1B4FB252}"/>
               </a:ext>
             </a:extLst>
           </p:cNvPr>
@@ -3015,7 +3835,7 @@
           <a:bodyPr/>
           <a:lstStyle/>
           <a:p>
-            <a:fld id="{4E062528-7899-4F1E-B4FB-AE19E5049ACE}" type="datetimeFigureOut">
+            <a:fld id="{FF776401-529C-4520-90C9-EC11B46F0E46}" type="datetimeFigureOut">
               <a:rPr lang="zh-CN" altLang="en-US" smtClean="0"/>
               <a:t>2026/10/14</a:t>
             </a:fld>
@@ -3028,7 +3848,7 @@
           <p:cNvPr id="5" name="页脚占位符 4">
             <a:extLst>
               <a:ext uri="{FF2B5EF4-FFF2-40B4-BE49-F238E27FC236}">
-                <a16:creationId xmlns:a16="http://schemas.microsoft.com/office/drawing/2014/main" id="{AE59642E-3B7F-46C9-018D-D411538BEB48}"/>
+                <a16:creationId xmlns:a16="http://schemas.microsoft.com/office/drawing/2014/main" id="{28CB7111-D56E-801E-3C80-FCAF8AECB1C4}"/>
               </a:ext>
             </a:extLst>
           </p:cNvPr>
@@ -3053,7 +3873,7 @@
           <p:cNvPr id="6" name="灯片编号占位符 5">
             <a:extLst>
               <a:ext uri="{FF2B5EF4-FFF2-40B4-BE49-F238E27FC236}">
-                <a16:creationId xmlns:a16="http://schemas.microsoft.com/office/drawing/2014/main" id="{A5724C2B-CCD5-1248-35B8-409A1E3C6A4C}"/>
+                <a16:creationId xmlns:a16="http://schemas.microsoft.com/office/drawing/2014/main" id="{B9B54E31-6274-0BDB-B7D8-B20F3E8CD3D9}"/>
               </a:ext>
             </a:extLst>
           </p:cNvPr>
@@ -3069,7 +3889,7 @@
           <a:bodyPr/>
           <a:lstStyle/>
           <a:p>
-            <a:fld id="{4B81E475-45AC-43A4-AC6E-22A7646F7618}" type="slidenum">
+            <a:fld id="{B7212D74-26B5-4FE8-B9EB-895A007E4038}" type="slidenum">
               <a:rPr lang="zh-CN" altLang="en-US" smtClean="0"/>
               <a:t>‹#›</a:t>
             </a:fld>
@@ -3080,7 +3900,7 @@
     </p:spTree>
     <p:extLst>
       <p:ext uri="{BB962C8B-B14F-4D97-AF65-F5344CB8AC3E}">
-        <p14:creationId xmlns:p14="http://schemas.microsoft.com/office/powerpoint/2010/main" val="603746179"/>
+        <p14:creationId xmlns:p14="http://schemas.microsoft.com/office/powerpoint/2010/main" val="3425687813"/>
       </p:ext>
     </p:extLst>
   </p:cSld>
@@ -3112,7 +3932,7 @@
           <p:cNvPr id="2" name="竖排标题 1">
             <a:extLst>
               <a:ext uri="{FF2B5EF4-FFF2-40B4-BE49-F238E27FC236}">
-                <a16:creationId xmlns:a16="http://schemas.microsoft.com/office/drawing/2014/main" id="{5E4CECE8-A548-34B3-C770-61C4231222D2}"/>
+                <a16:creationId xmlns:a16="http://schemas.microsoft.com/office/drawing/2014/main" id="{0C464ECF-74CB-4071-5709-65BEA8451FC6}"/>
               </a:ext>
             </a:extLst>
           </p:cNvPr>
@@ -3145,7 +3965,7 @@
           <p:cNvPr id="3" name="竖排文字占位符 2">
             <a:extLst>
               <a:ext uri="{FF2B5EF4-FFF2-40B4-BE49-F238E27FC236}">
-                <a16:creationId xmlns:a16="http://schemas.microsoft.com/office/drawing/2014/main" id="{C13E83E4-14F4-0D3E-EBC4-E978F906730F}"/>
+                <a16:creationId xmlns:a16="http://schemas.microsoft.com/office/drawing/2014/main" id="{F00E5337-D1D6-BB09-1372-891976A509A7}"/>
               </a:ext>
             </a:extLst>
           </p:cNvPr>
@@ -3207,7 +4027,7 @@
           <p:cNvPr id="4" name="日期占位符 3">
             <a:extLst>
               <a:ext uri="{FF2B5EF4-FFF2-40B4-BE49-F238E27FC236}">
-                <a16:creationId xmlns:a16="http://schemas.microsoft.com/office/drawing/2014/main" id="{399B5FEF-B050-7727-C07F-1EDFEA0F296C}"/>
+                <a16:creationId xmlns:a16="http://schemas.microsoft.com/office/drawing/2014/main" id="{B6C8206C-5707-602A-4E34-3271790E438D}"/>
               </a:ext>
             </a:extLst>
           </p:cNvPr>
@@ -3223,7 +4043,7 @@
           <a:bodyPr/>
           <a:lstStyle/>
           <a:p>
-            <a:fld id="{4E062528-7899-4F1E-B4FB-AE19E5049ACE}" type="datetimeFigureOut">
+            <a:fld id="{FF776401-529C-4520-90C9-EC11B46F0E46}" type="datetimeFigureOut">
               <a:rPr lang="zh-CN" altLang="en-US" smtClean="0"/>
               <a:t>2026/10/14</a:t>
             </a:fld>
@@ -3236,7 +4056,7 @@
           <p:cNvPr id="5" name="页脚占位符 4">
             <a:extLst>
               <a:ext uri="{FF2B5EF4-FFF2-40B4-BE49-F238E27FC236}">
-                <a16:creationId xmlns:a16="http://schemas.microsoft.com/office/drawing/2014/main" id="{ED5B984E-C10D-D5BA-4ABB-D741B3029B3A}"/>
+                <a16:creationId xmlns:a16="http://schemas.microsoft.com/office/drawing/2014/main" id="{5D74658D-AB79-5EC5-FFD1-59CA1A0F150B}"/>
               </a:ext>
             </a:extLst>
           </p:cNvPr>
@@ -3261,7 +4081,7 @@
           <p:cNvPr id="6" name="灯片编号占位符 5">
             <a:extLst>
               <a:ext uri="{FF2B5EF4-FFF2-40B4-BE49-F238E27FC236}">
-                <a16:creationId xmlns:a16="http://schemas.microsoft.com/office/drawing/2014/main" id="{AF47E7A9-AE11-9A04-820A-F6322FB704AD}"/>
+                <a16:creationId xmlns:a16="http://schemas.microsoft.com/office/drawing/2014/main" id="{E7F4C5D7-27B2-B1C5-82A7-668D66A78C7D}"/>
               </a:ext>
             </a:extLst>
           </p:cNvPr>
@@ -3277,7 +4097,7 @@
           <a:bodyPr/>
           <a:lstStyle/>
           <a:p>
-            <a:fld id="{4B81E475-45AC-43A4-AC6E-22A7646F7618}" type="slidenum">
+            <a:fld id="{B7212D74-26B5-4FE8-B9EB-895A007E4038}" type="slidenum">
               <a:rPr lang="zh-CN" altLang="en-US" smtClean="0"/>
               <a:t>‹#›</a:t>
             </a:fld>
@@ -3288,7 +4108,7 @@
     </p:spTree>
     <p:extLst>
       <p:ext uri="{BB962C8B-B14F-4D97-AF65-F5344CB8AC3E}">
-        <p14:creationId xmlns:p14="http://schemas.microsoft.com/office/powerpoint/2010/main" val="2232418076"/>
+        <p14:creationId xmlns:p14="http://schemas.microsoft.com/office/powerpoint/2010/main" val="871604596"/>
       </p:ext>
     </p:extLst>
   </p:cSld>
@@ -3320,7 +4140,7 @@
           <p:cNvPr id="2" name="标题 1">
             <a:extLst>
               <a:ext uri="{FF2B5EF4-FFF2-40B4-BE49-F238E27FC236}">
-                <a16:creationId xmlns:a16="http://schemas.microsoft.com/office/drawing/2014/main" id="{938672C2-3FAF-33B9-9A3B-D7753256DB90}"/>
+                <a16:creationId xmlns:a16="http://schemas.microsoft.com/office/drawing/2014/main" id="{A5FB18A9-33B6-133B-04BF-18ED2A458645}"/>
               </a:ext>
             </a:extLst>
           </p:cNvPr>
@@ -3348,7 +4168,7 @@
           <p:cNvPr id="3" name="内容占位符 2">
             <a:extLst>
               <a:ext uri="{FF2B5EF4-FFF2-40B4-BE49-F238E27FC236}">
-                <a16:creationId xmlns:a16="http://schemas.microsoft.com/office/drawing/2014/main" id="{3A8A9B70-23E0-4EAC-3628-CC577376C9BA}"/>
+                <a16:creationId xmlns:a16="http://schemas.microsoft.com/office/drawing/2014/main" id="{3481A35B-2E6B-7352-FAC4-1BB1C5690464}"/>
               </a:ext>
             </a:extLst>
           </p:cNvPr>
@@ -3405,7 +4225,7 @@
           <p:cNvPr id="4" name="日期占位符 3">
             <a:extLst>
               <a:ext uri="{FF2B5EF4-FFF2-40B4-BE49-F238E27FC236}">
-                <a16:creationId xmlns:a16="http://schemas.microsoft.com/office/drawing/2014/main" id="{A583C539-1571-680A-5643-7ECC653544D1}"/>
+                <a16:creationId xmlns:a16="http://schemas.microsoft.com/office/drawing/2014/main" id="{7876D3A7-7D79-EF53-FA3B-94AEA9575F13}"/>
               </a:ext>
             </a:extLst>
           </p:cNvPr>
@@ -3421,7 +4241,7 @@
           <a:bodyPr/>
           <a:lstStyle/>
           <a:p>
-            <a:fld id="{4E062528-7899-4F1E-B4FB-AE19E5049ACE}" type="datetimeFigureOut">
+            <a:fld id="{FF776401-529C-4520-90C9-EC11B46F0E46}" type="datetimeFigureOut">
               <a:rPr lang="zh-CN" altLang="en-US" smtClean="0"/>
               <a:t>2026/10/14</a:t>
             </a:fld>
@@ -3434,7 +4254,7 @@
           <p:cNvPr id="5" name="页脚占位符 4">
             <a:extLst>
               <a:ext uri="{FF2B5EF4-FFF2-40B4-BE49-F238E27FC236}">
-                <a16:creationId xmlns:a16="http://schemas.microsoft.com/office/drawing/2014/main" id="{CC83C53C-FC8C-B222-8621-6B5D57528031}"/>
+                <a16:creationId xmlns:a16="http://schemas.microsoft.com/office/drawing/2014/main" id="{0EB2A442-8428-9416-4088-2C4F1E4D7080}"/>
               </a:ext>
             </a:extLst>
           </p:cNvPr>
@@ -3459,7 +4279,7 @@
           <p:cNvPr id="6" name="灯片编号占位符 5">
             <a:extLst>
               <a:ext uri="{FF2B5EF4-FFF2-40B4-BE49-F238E27FC236}">
-                <a16:creationId xmlns:a16="http://schemas.microsoft.com/office/drawing/2014/main" id="{0949456C-E7F2-7572-A8AB-E7E0AEDE7C3D}"/>
+                <a16:creationId xmlns:a16="http://schemas.microsoft.com/office/drawing/2014/main" id="{A43CB861-DDA3-54C0-0C45-A2693E0280DD}"/>
               </a:ext>
             </a:extLst>
           </p:cNvPr>
@@ -3475,7 +4295,7 @@
           <a:bodyPr/>
           <a:lstStyle/>
           <a:p>
-            <a:fld id="{4B81E475-45AC-43A4-AC6E-22A7646F7618}" type="slidenum">
+            <a:fld id="{B7212D74-26B5-4FE8-B9EB-895A007E4038}" type="slidenum">
               <a:rPr lang="zh-CN" altLang="en-US" smtClean="0"/>
               <a:t>‹#›</a:t>
             </a:fld>
@@ -3486,7 +4306,7 @@
     </p:spTree>
     <p:extLst>
       <p:ext uri="{BB962C8B-B14F-4D97-AF65-F5344CB8AC3E}">
-        <p14:creationId xmlns:p14="http://schemas.microsoft.com/office/powerpoint/2010/main" val="1752694165"/>
+        <p14:creationId xmlns:p14="http://schemas.microsoft.com/office/powerpoint/2010/main" val="2061076626"/>
       </p:ext>
     </p:extLst>
   </p:cSld>
@@ -3518,7 +4338,7 @@
           <p:cNvPr id="2" name="标题 1">
             <a:extLst>
               <a:ext uri="{FF2B5EF4-FFF2-40B4-BE49-F238E27FC236}">
-                <a16:creationId xmlns:a16="http://schemas.microsoft.com/office/drawing/2014/main" id="{88179798-25D6-87B9-1382-5D466E72186A}"/>
+                <a16:creationId xmlns:a16="http://schemas.microsoft.com/office/drawing/2014/main" id="{DCEE960D-4017-377E-11A9-918F6ED3E8BF}"/>
               </a:ext>
             </a:extLst>
           </p:cNvPr>
@@ -3555,7 +4375,7 @@
           <p:cNvPr id="3" name="文本占位符 2">
             <a:extLst>
               <a:ext uri="{FF2B5EF4-FFF2-40B4-BE49-F238E27FC236}">
-                <a16:creationId xmlns:a16="http://schemas.microsoft.com/office/drawing/2014/main" id="{AFEA4D8D-DE40-9E86-EC99-076869A653D1}"/>
+                <a16:creationId xmlns:a16="http://schemas.microsoft.com/office/drawing/2014/main" id="{186612EA-C57F-8AB0-B494-3266037ADCD9}"/>
               </a:ext>
             </a:extLst>
           </p:cNvPr>
@@ -3680,7 +4500,7 @@
           <p:cNvPr id="4" name="日期占位符 3">
             <a:extLst>
               <a:ext uri="{FF2B5EF4-FFF2-40B4-BE49-F238E27FC236}">
-                <a16:creationId xmlns:a16="http://schemas.microsoft.com/office/drawing/2014/main" id="{E118C5DD-DBCC-2FE7-E1E1-1A450D490770}"/>
+                <a16:creationId xmlns:a16="http://schemas.microsoft.com/office/drawing/2014/main" id="{58159911-FAD8-2EA6-F660-FF38629BADD5}"/>
               </a:ext>
             </a:extLst>
           </p:cNvPr>
@@ -3696,7 +4516,7 @@
           <a:bodyPr/>
           <a:lstStyle/>
           <a:p>
-            <a:fld id="{4E062528-7899-4F1E-B4FB-AE19E5049ACE}" type="datetimeFigureOut">
+            <a:fld id="{FF776401-529C-4520-90C9-EC11B46F0E46}" type="datetimeFigureOut">
               <a:rPr lang="zh-CN" altLang="en-US" smtClean="0"/>
               <a:t>2026/10/14</a:t>
             </a:fld>
@@ -3709,7 +4529,7 @@
           <p:cNvPr id="5" name="页脚占位符 4">
             <a:extLst>
               <a:ext uri="{FF2B5EF4-FFF2-40B4-BE49-F238E27FC236}">
-                <a16:creationId xmlns:a16="http://schemas.microsoft.com/office/drawing/2014/main" id="{A8B8043E-3515-8E1F-AA3C-8D3277D389FB}"/>
+                <a16:creationId xmlns:a16="http://schemas.microsoft.com/office/drawing/2014/main" id="{2AE7DFFC-3AB4-4661-A6FB-18DE4C0C8318}"/>
               </a:ext>
             </a:extLst>
           </p:cNvPr>
@@ -3734,7 +4554,7 @@
           <p:cNvPr id="6" name="灯片编号占位符 5">
             <a:extLst>
               <a:ext uri="{FF2B5EF4-FFF2-40B4-BE49-F238E27FC236}">
-                <a16:creationId xmlns:a16="http://schemas.microsoft.com/office/drawing/2014/main" id="{92145327-ADED-BCAB-3B6A-D6FF2BA2B5E8}"/>
+                <a16:creationId xmlns:a16="http://schemas.microsoft.com/office/drawing/2014/main" id="{7EBAD591-2A3B-95D3-601C-75F6A9F2CBC2}"/>
               </a:ext>
             </a:extLst>
           </p:cNvPr>
@@ -3750,7 +4570,7 @@
           <a:bodyPr/>
           <a:lstStyle/>
           <a:p>
-            <a:fld id="{4B81E475-45AC-43A4-AC6E-22A7646F7618}" type="slidenum">
+            <a:fld id="{B7212D74-26B5-4FE8-B9EB-895A007E4038}" type="slidenum">
               <a:rPr lang="zh-CN" altLang="en-US" smtClean="0"/>
               <a:t>‹#›</a:t>
             </a:fld>
@@ -3761,7 +4581,7 @@
     </p:spTree>
     <p:extLst>
       <p:ext uri="{BB962C8B-B14F-4D97-AF65-F5344CB8AC3E}">
-        <p14:creationId xmlns:p14="http://schemas.microsoft.com/office/powerpoint/2010/main" val="3006299554"/>
+        <p14:creationId xmlns:p14="http://schemas.microsoft.com/office/powerpoint/2010/main" val="1731878016"/>
       </p:ext>
     </p:extLst>
   </p:cSld>
@@ -3793,7 +4613,7 @@
           <p:cNvPr id="2" name="标题 1">
             <a:extLst>
               <a:ext uri="{FF2B5EF4-FFF2-40B4-BE49-F238E27FC236}">
-                <a16:creationId xmlns:a16="http://schemas.microsoft.com/office/drawing/2014/main" id="{28D45224-89E2-0298-AAA6-CEBAD98BA287}"/>
+                <a16:creationId xmlns:a16="http://schemas.microsoft.com/office/drawing/2014/main" id="{7B30B58B-8A0E-202E-FAC6-3CFACFCD3CF6}"/>
               </a:ext>
             </a:extLst>
           </p:cNvPr>
@@ -3821,7 +4641,7 @@
           <p:cNvPr id="3" name="内容占位符 2">
             <a:extLst>
               <a:ext uri="{FF2B5EF4-FFF2-40B4-BE49-F238E27FC236}">
-                <a16:creationId xmlns:a16="http://schemas.microsoft.com/office/drawing/2014/main" id="{39C16FCF-5585-4213-4E73-2E6E61C57F4E}"/>
+                <a16:creationId xmlns:a16="http://schemas.microsoft.com/office/drawing/2014/main" id="{5E67F8F6-7830-5509-DC41-C20E9A716F80}"/>
               </a:ext>
             </a:extLst>
           </p:cNvPr>
@@ -3883,7 +4703,7 @@
           <p:cNvPr id="4" name="内容占位符 3">
             <a:extLst>
               <a:ext uri="{FF2B5EF4-FFF2-40B4-BE49-F238E27FC236}">
-                <a16:creationId xmlns:a16="http://schemas.microsoft.com/office/drawing/2014/main" id="{43ED1892-04C6-D006-3142-5878F8BAADC6}"/>
+                <a16:creationId xmlns:a16="http://schemas.microsoft.com/office/drawing/2014/main" id="{E724C45A-2DE4-17D6-FAC7-C9A0A560F868}"/>
               </a:ext>
             </a:extLst>
           </p:cNvPr>
@@ -3945,7 +4765,7 @@
           <p:cNvPr id="5" name="日期占位符 4">
             <a:extLst>
               <a:ext uri="{FF2B5EF4-FFF2-40B4-BE49-F238E27FC236}">
-                <a16:creationId xmlns:a16="http://schemas.microsoft.com/office/drawing/2014/main" id="{AF4867FC-8366-7613-D440-D7C7B0C809C2}"/>
+                <a16:creationId xmlns:a16="http://schemas.microsoft.com/office/drawing/2014/main" id="{8B6CC17E-03BF-A281-8D5F-0A4929CCEEBC}"/>
               </a:ext>
             </a:extLst>
           </p:cNvPr>
@@ -3961,7 +4781,7 @@
           <a:bodyPr/>
           <a:lstStyle/>
           <a:p>
-            <a:fld id="{4E062528-7899-4F1E-B4FB-AE19E5049ACE}" type="datetimeFigureOut">
+            <a:fld id="{FF776401-529C-4520-90C9-EC11B46F0E46}" type="datetimeFigureOut">
               <a:rPr lang="zh-CN" altLang="en-US" smtClean="0"/>
               <a:t>2026/10/14</a:t>
             </a:fld>
@@ -3974,7 +4794,7 @@
           <p:cNvPr id="6" name="页脚占位符 5">
             <a:extLst>
               <a:ext uri="{FF2B5EF4-FFF2-40B4-BE49-F238E27FC236}">
-                <a16:creationId xmlns:a16="http://schemas.microsoft.com/office/drawing/2014/main" id="{9204BAF6-A910-C1D9-DCEB-9C600A5C137A}"/>
+                <a16:creationId xmlns:a16="http://schemas.microsoft.com/office/drawing/2014/main" id="{4EC60471-DEBE-2985-EC53-EB887777BB17}"/>
               </a:ext>
             </a:extLst>
           </p:cNvPr>
@@ -3999,7 +4819,7 @@
           <p:cNvPr id="7" name="灯片编号占位符 6">
             <a:extLst>
               <a:ext uri="{FF2B5EF4-FFF2-40B4-BE49-F238E27FC236}">
-                <a16:creationId xmlns:a16="http://schemas.microsoft.com/office/drawing/2014/main" id="{29BACDC1-34CC-4624-D070-E01ACAA94263}"/>
+                <a16:creationId xmlns:a16="http://schemas.microsoft.com/office/drawing/2014/main" id="{5265922D-2B49-09AA-239B-CD5A376F1193}"/>
               </a:ext>
             </a:extLst>
           </p:cNvPr>
@@ -4015,7 +4835,7 @@
           <a:bodyPr/>
           <a:lstStyle/>
           <a:p>
-            <a:fld id="{4B81E475-45AC-43A4-AC6E-22A7646F7618}" type="slidenum">
+            <a:fld id="{B7212D74-26B5-4FE8-B9EB-895A007E4038}" type="slidenum">
               <a:rPr lang="zh-CN" altLang="en-US" smtClean="0"/>
               <a:t>‹#›</a:t>
             </a:fld>
@@ -4026,7 +4846,7 @@
     </p:spTree>
     <p:extLst>
       <p:ext uri="{BB962C8B-B14F-4D97-AF65-F5344CB8AC3E}">
-        <p14:creationId xmlns:p14="http://schemas.microsoft.com/office/powerpoint/2010/main" val="64336553"/>
+        <p14:creationId xmlns:p14="http://schemas.microsoft.com/office/powerpoint/2010/main" val="2056032162"/>
       </p:ext>
     </p:extLst>
   </p:cSld>
@@ -4058,7 +4878,7 @@
           <p:cNvPr id="2" name="标题 1">
             <a:extLst>
               <a:ext uri="{FF2B5EF4-FFF2-40B4-BE49-F238E27FC236}">
-                <a16:creationId xmlns:a16="http://schemas.microsoft.com/office/drawing/2014/main" id="{600A4A1B-6CD6-6D7A-1EC9-FEF6C484DB59}"/>
+                <a16:creationId xmlns:a16="http://schemas.microsoft.com/office/drawing/2014/main" id="{EF5D76BB-644F-27AA-04AD-2915480E8D82}"/>
               </a:ext>
             </a:extLst>
           </p:cNvPr>
@@ -4091,7 +4911,7 @@
           <p:cNvPr id="3" name="文本占位符 2">
             <a:extLst>
               <a:ext uri="{FF2B5EF4-FFF2-40B4-BE49-F238E27FC236}">
-                <a16:creationId xmlns:a16="http://schemas.microsoft.com/office/drawing/2014/main" id="{F82DC466-9609-8DE2-E102-97293AEEBCDF}"/>
+                <a16:creationId xmlns:a16="http://schemas.microsoft.com/office/drawing/2014/main" id="{74E06E04-4CE5-4D1E-87BC-E69776C5F9C8}"/>
               </a:ext>
             </a:extLst>
           </p:cNvPr>
@@ -4162,7 +4982,7 @@
           <p:cNvPr id="4" name="内容占位符 3">
             <a:extLst>
               <a:ext uri="{FF2B5EF4-FFF2-40B4-BE49-F238E27FC236}">
-                <a16:creationId xmlns:a16="http://schemas.microsoft.com/office/drawing/2014/main" id="{BE1C9BA1-7711-90E5-0A83-FBF949804122}"/>
+                <a16:creationId xmlns:a16="http://schemas.microsoft.com/office/drawing/2014/main" id="{9A1F93BC-E854-C6E3-E6C4-1C213032C753}"/>
               </a:ext>
             </a:extLst>
           </p:cNvPr>
@@ -4224,7 +5044,7 @@
           <p:cNvPr id="5" name="文本占位符 4">
             <a:extLst>
               <a:ext uri="{FF2B5EF4-FFF2-40B4-BE49-F238E27FC236}">
-                <a16:creationId xmlns:a16="http://schemas.microsoft.com/office/drawing/2014/main" id="{163826D9-D9DD-61DA-0E29-C7A3D065E706}"/>
+                <a16:creationId xmlns:a16="http://schemas.microsoft.com/office/drawing/2014/main" id="{61AE16A3-BAC2-4ECF-0A6F-E7232A0D356F}"/>
               </a:ext>
             </a:extLst>
           </p:cNvPr>
@@ -4295,7 +5115,7 @@
           <p:cNvPr id="6" name="内容占位符 5">
             <a:extLst>
               <a:ext uri="{FF2B5EF4-FFF2-40B4-BE49-F238E27FC236}">
-                <a16:creationId xmlns:a16="http://schemas.microsoft.com/office/drawing/2014/main" id="{853AB7AF-1979-2A9F-5759-5B14EFA47392}"/>
+                <a16:creationId xmlns:a16="http://schemas.microsoft.com/office/drawing/2014/main" id="{166ECF43-500E-8E4B-6664-D457057AED42}"/>
               </a:ext>
             </a:extLst>
           </p:cNvPr>
@@ -4357,7 +5177,7 @@
           <p:cNvPr id="7" name="日期占位符 6">
             <a:extLst>
               <a:ext uri="{FF2B5EF4-FFF2-40B4-BE49-F238E27FC236}">
-                <a16:creationId xmlns:a16="http://schemas.microsoft.com/office/drawing/2014/main" id="{8DA522C2-DD44-4DF9-4EFB-8736D57FDAE8}"/>
+                <a16:creationId xmlns:a16="http://schemas.microsoft.com/office/drawing/2014/main" id="{A1B0C695-5FB6-E0AB-A884-7FBB8D87311A}"/>
               </a:ext>
             </a:extLst>
           </p:cNvPr>
@@ -4373,7 +5193,7 @@
           <a:bodyPr/>
           <a:lstStyle/>
           <a:p>
-            <a:fld id="{4E062528-7899-4F1E-B4FB-AE19E5049ACE}" type="datetimeFigureOut">
+            <a:fld id="{FF776401-529C-4520-90C9-EC11B46F0E46}" type="datetimeFigureOut">
               <a:rPr lang="zh-CN" altLang="en-US" smtClean="0"/>
               <a:t>2026/10/14</a:t>
             </a:fld>
@@ -4386,7 +5206,7 @@
           <p:cNvPr id="8" name="页脚占位符 7">
             <a:extLst>
               <a:ext uri="{FF2B5EF4-FFF2-40B4-BE49-F238E27FC236}">
-                <a16:creationId xmlns:a16="http://schemas.microsoft.com/office/drawing/2014/main" id="{A3252381-43BB-B6AE-FF38-6F0FB2F98BCC}"/>
+                <a16:creationId xmlns:a16="http://schemas.microsoft.com/office/drawing/2014/main" id="{FB53F4C1-1694-5A40-C7C5-7976FB993926}"/>
               </a:ext>
             </a:extLst>
           </p:cNvPr>
@@ -4411,7 +5231,7 @@
           <p:cNvPr id="9" name="灯片编号占位符 8">
             <a:extLst>
               <a:ext uri="{FF2B5EF4-FFF2-40B4-BE49-F238E27FC236}">
-                <a16:creationId xmlns:a16="http://schemas.microsoft.com/office/drawing/2014/main" id="{C5610AE6-9FFF-4699-05AD-2D5D7488F4CF}"/>
+                <a16:creationId xmlns:a16="http://schemas.microsoft.com/office/drawing/2014/main" id="{8A954A9E-1C92-1045-EDFA-8B5C5A445199}"/>
               </a:ext>
             </a:extLst>
           </p:cNvPr>
@@ -4427,7 +5247,7 @@
           <a:bodyPr/>
           <a:lstStyle/>
           <a:p>
-            <a:fld id="{4B81E475-45AC-43A4-AC6E-22A7646F7618}" type="slidenum">
+            <a:fld id="{B7212D74-26B5-4FE8-B9EB-895A007E4038}" type="slidenum">
               <a:rPr lang="zh-CN" altLang="en-US" smtClean="0"/>
               <a:t>‹#›</a:t>
             </a:fld>
@@ -4438,7 +5258,7 @@
     </p:spTree>
     <p:extLst>
       <p:ext uri="{BB962C8B-B14F-4D97-AF65-F5344CB8AC3E}">
-        <p14:creationId xmlns:p14="http://schemas.microsoft.com/office/powerpoint/2010/main" val="661603440"/>
+        <p14:creationId xmlns:p14="http://schemas.microsoft.com/office/powerpoint/2010/main" val="28767999"/>
       </p:ext>
     </p:extLst>
   </p:cSld>
@@ -4470,7 +5290,7 @@
           <p:cNvPr id="2" name="标题 1">
             <a:extLst>
               <a:ext uri="{FF2B5EF4-FFF2-40B4-BE49-F238E27FC236}">
-                <a16:creationId xmlns:a16="http://schemas.microsoft.com/office/drawing/2014/main" id="{14669FE9-F9AF-0A19-E363-C1AF6D5FE008}"/>
+                <a16:creationId xmlns:a16="http://schemas.microsoft.com/office/drawing/2014/main" id="{81CDD69B-4808-A006-FF3C-675C5C66708D}"/>
               </a:ext>
             </a:extLst>
           </p:cNvPr>
@@ -4498,7 +5318,7 @@
           <p:cNvPr id="3" name="日期占位符 2">
             <a:extLst>
               <a:ext uri="{FF2B5EF4-FFF2-40B4-BE49-F238E27FC236}">
-                <a16:creationId xmlns:a16="http://schemas.microsoft.com/office/drawing/2014/main" id="{92A4B08C-0714-D775-045A-B5E254764EEC}"/>
+                <a16:creationId xmlns:a16="http://schemas.microsoft.com/office/drawing/2014/main" id="{0AA00FE8-EA5F-4725-11CC-4CC25BBDBA8A}"/>
               </a:ext>
             </a:extLst>
           </p:cNvPr>
@@ -4514,7 +5334,7 @@
           <a:bodyPr/>
           <a:lstStyle/>
           <a:p>
-            <a:fld id="{4E062528-7899-4F1E-B4FB-AE19E5049ACE}" type="datetimeFigureOut">
+            <a:fld id="{FF776401-529C-4520-90C9-EC11B46F0E46}" type="datetimeFigureOut">
               <a:rPr lang="zh-CN" altLang="en-US" smtClean="0"/>
               <a:t>2026/10/14</a:t>
             </a:fld>
@@ -4527,7 +5347,7 @@
           <p:cNvPr id="4" name="页脚占位符 3">
             <a:extLst>
               <a:ext uri="{FF2B5EF4-FFF2-40B4-BE49-F238E27FC236}">
-                <a16:creationId xmlns:a16="http://schemas.microsoft.com/office/drawing/2014/main" id="{422F75C9-36D0-620C-471F-70E089EF1B32}"/>
+                <a16:creationId xmlns:a16="http://schemas.microsoft.com/office/drawing/2014/main" id="{9C8A2115-50DC-F33B-55B0-C3C76E043FDD}"/>
               </a:ext>
             </a:extLst>
           </p:cNvPr>
@@ -4552,7 +5372,7 @@
           <p:cNvPr id="5" name="灯片编号占位符 4">
             <a:extLst>
               <a:ext uri="{FF2B5EF4-FFF2-40B4-BE49-F238E27FC236}">
-                <a16:creationId xmlns:a16="http://schemas.microsoft.com/office/drawing/2014/main" id="{F788497B-28C4-07F1-59D3-1FA54A7C215A}"/>
+                <a16:creationId xmlns:a16="http://schemas.microsoft.com/office/drawing/2014/main" id="{47327DF3-607F-8DD8-44F3-C5E567CFB266}"/>
               </a:ext>
             </a:extLst>
           </p:cNvPr>
@@ -4568,7 +5388,7 @@
           <a:bodyPr/>
           <a:lstStyle/>
           <a:p>
-            <a:fld id="{4B81E475-45AC-43A4-AC6E-22A7646F7618}" type="slidenum">
+            <a:fld id="{B7212D74-26B5-4FE8-B9EB-895A007E4038}" type="slidenum">
               <a:rPr lang="zh-CN" altLang="en-US" smtClean="0"/>
               <a:t>‹#›</a:t>
             </a:fld>
@@ -4579,7 +5399,7 @@
     </p:spTree>
     <p:extLst>
       <p:ext uri="{BB962C8B-B14F-4D97-AF65-F5344CB8AC3E}">
-        <p14:creationId xmlns:p14="http://schemas.microsoft.com/office/powerpoint/2010/main" val="2990932142"/>
+        <p14:creationId xmlns:p14="http://schemas.microsoft.com/office/powerpoint/2010/main" val="2430214159"/>
       </p:ext>
     </p:extLst>
   </p:cSld>
@@ -4611,7 +5431,7 @@
           <p:cNvPr id="2" name="日期占位符 1">
             <a:extLst>
               <a:ext uri="{FF2B5EF4-FFF2-40B4-BE49-F238E27FC236}">
-                <a16:creationId xmlns:a16="http://schemas.microsoft.com/office/drawing/2014/main" id="{00B19FCF-E1EE-B7FC-4310-DE8C410C193F}"/>
+                <a16:creationId xmlns:a16="http://schemas.microsoft.com/office/drawing/2014/main" id="{1E7E95EB-40BD-1994-9B03-7F406B055086}"/>
               </a:ext>
             </a:extLst>
           </p:cNvPr>
@@ -4627,7 +5447,7 @@
           <a:bodyPr/>
           <a:lstStyle/>
           <a:p>
-            <a:fld id="{4E062528-7899-4F1E-B4FB-AE19E5049ACE}" type="datetimeFigureOut">
+            <a:fld id="{FF776401-529C-4520-90C9-EC11B46F0E46}" type="datetimeFigureOut">
               <a:rPr lang="zh-CN" altLang="en-US" smtClean="0"/>
               <a:t>2026/10/14</a:t>
             </a:fld>
@@ -4640,7 +5460,7 @@
           <p:cNvPr id="3" name="页脚占位符 2">
             <a:extLst>
               <a:ext uri="{FF2B5EF4-FFF2-40B4-BE49-F238E27FC236}">
-                <a16:creationId xmlns:a16="http://schemas.microsoft.com/office/drawing/2014/main" id="{B37E3A2F-543C-419B-2AC3-0A616B67A569}"/>
+                <a16:creationId xmlns:a16="http://schemas.microsoft.com/office/drawing/2014/main" id="{FEC7FEBC-5D74-4B2A-34E8-390A37419865}"/>
               </a:ext>
             </a:extLst>
           </p:cNvPr>
@@ -4665,7 +5485,7 @@
           <p:cNvPr id="4" name="灯片编号占位符 3">
             <a:extLst>
               <a:ext uri="{FF2B5EF4-FFF2-40B4-BE49-F238E27FC236}">
-                <a16:creationId xmlns:a16="http://schemas.microsoft.com/office/drawing/2014/main" id="{47047837-32E6-6249-8E23-38AB7F89319A}"/>
+                <a16:creationId xmlns:a16="http://schemas.microsoft.com/office/drawing/2014/main" id="{FBF99E1B-F05E-3DD8-D900-42ED3007FE2B}"/>
               </a:ext>
             </a:extLst>
           </p:cNvPr>
@@ -4681,7 +5501,7 @@
           <a:bodyPr/>
           <a:lstStyle/>
           <a:p>
-            <a:fld id="{4B81E475-45AC-43A4-AC6E-22A7646F7618}" type="slidenum">
+            <a:fld id="{B7212D74-26B5-4FE8-B9EB-895A007E4038}" type="slidenum">
               <a:rPr lang="zh-CN" altLang="en-US" smtClean="0"/>
               <a:t>‹#›</a:t>
             </a:fld>
@@ -4692,7 +5512,7 @@
     </p:spTree>
     <p:extLst>
       <p:ext uri="{BB962C8B-B14F-4D97-AF65-F5344CB8AC3E}">
-        <p14:creationId xmlns:p14="http://schemas.microsoft.com/office/powerpoint/2010/main" val="4197076918"/>
+        <p14:creationId xmlns:p14="http://schemas.microsoft.com/office/powerpoint/2010/main" val="2068900963"/>
       </p:ext>
     </p:extLst>
   </p:cSld>
@@ -4724,7 +5544,7 @@
           <p:cNvPr id="2" name="标题 1">
             <a:extLst>
               <a:ext uri="{FF2B5EF4-FFF2-40B4-BE49-F238E27FC236}">
-                <a16:creationId xmlns:a16="http://schemas.microsoft.com/office/drawing/2014/main" id="{EA6C68EF-C822-08A2-AB54-CA74475A0551}"/>
+                <a16:creationId xmlns:a16="http://schemas.microsoft.com/office/drawing/2014/main" id="{142A5873-C479-BEF7-29BB-0A1B8FAEC417}"/>
               </a:ext>
             </a:extLst>
           </p:cNvPr>
@@ -4761,7 +5581,7 @@
           <p:cNvPr id="3" name="内容占位符 2">
             <a:extLst>
               <a:ext uri="{FF2B5EF4-FFF2-40B4-BE49-F238E27FC236}">
-                <a16:creationId xmlns:a16="http://schemas.microsoft.com/office/drawing/2014/main" id="{2E000D21-2FCF-80F1-5E9C-9D58C5F2A5F2}"/>
+                <a16:creationId xmlns:a16="http://schemas.microsoft.com/office/drawing/2014/main" id="{9A2332FB-312B-7380-0C5F-29BCA2DA460C}"/>
               </a:ext>
             </a:extLst>
           </p:cNvPr>
@@ -4851,7 +5671,7 @@
           <p:cNvPr id="4" name="文本占位符 3">
             <a:extLst>
               <a:ext uri="{FF2B5EF4-FFF2-40B4-BE49-F238E27FC236}">
-                <a16:creationId xmlns:a16="http://schemas.microsoft.com/office/drawing/2014/main" id="{45E85FA0-93A8-6AEC-E55B-6088BA4518AD}"/>
+                <a16:creationId xmlns:a16="http://schemas.microsoft.com/office/drawing/2014/main" id="{99BCCA26-A5A6-FD22-3E50-4B9E2D4E7AF1}"/>
               </a:ext>
             </a:extLst>
           </p:cNvPr>
@@ -4922,7 +5742,7 @@
           <p:cNvPr id="5" name="日期占位符 4">
             <a:extLst>
               <a:ext uri="{FF2B5EF4-FFF2-40B4-BE49-F238E27FC236}">
-                <a16:creationId xmlns:a16="http://schemas.microsoft.com/office/drawing/2014/main" id="{20AB80FE-5228-2BE3-EF57-13F5BEA21F09}"/>
+                <a16:creationId xmlns:a16="http://schemas.microsoft.com/office/drawing/2014/main" id="{4DCF4788-67A3-F6EC-CBB4-B7B44E9EF6B5}"/>
               </a:ext>
             </a:extLst>
           </p:cNvPr>
@@ -4938,7 +5758,7 @@
           <a:bodyPr/>
           <a:lstStyle/>
           <a:p>
-            <a:fld id="{4E062528-7899-4F1E-B4FB-AE19E5049ACE}" type="datetimeFigureOut">
+            <a:fld id="{FF776401-529C-4520-90C9-EC11B46F0E46}" type="datetimeFigureOut">
               <a:rPr lang="zh-CN" altLang="en-US" smtClean="0"/>
               <a:t>2026/10/14</a:t>
             </a:fld>
@@ -4951,7 +5771,7 @@
           <p:cNvPr id="6" name="页脚占位符 5">
             <a:extLst>
               <a:ext uri="{FF2B5EF4-FFF2-40B4-BE49-F238E27FC236}">
-                <a16:creationId xmlns:a16="http://schemas.microsoft.com/office/drawing/2014/main" id="{A4CD32D5-19E1-F9B2-3869-544799C1D597}"/>
+                <a16:creationId xmlns:a16="http://schemas.microsoft.com/office/drawing/2014/main" id="{DF783442-841B-EF9D-6AD3-633B5E3E6A14}"/>
               </a:ext>
             </a:extLst>
           </p:cNvPr>
@@ -4976,7 +5796,7 @@
           <p:cNvPr id="7" name="灯片编号占位符 6">
             <a:extLst>
               <a:ext uri="{FF2B5EF4-FFF2-40B4-BE49-F238E27FC236}">
-                <a16:creationId xmlns:a16="http://schemas.microsoft.com/office/drawing/2014/main" id="{0404FFEB-34F3-FEBF-27D7-A0EB9588AE76}"/>
+                <a16:creationId xmlns:a16="http://schemas.microsoft.com/office/drawing/2014/main" id="{B607A551-96DF-199B-C3E1-DCD4FBAA5B8E}"/>
               </a:ext>
             </a:extLst>
           </p:cNvPr>
@@ -4992,7 +5812,7 @@
           <a:bodyPr/>
           <a:lstStyle/>
           <a:p>
-            <a:fld id="{4B81E475-45AC-43A4-AC6E-22A7646F7618}" type="slidenum">
+            <a:fld id="{B7212D74-26B5-4FE8-B9EB-895A007E4038}" type="slidenum">
               <a:rPr lang="zh-CN" altLang="en-US" smtClean="0"/>
               <a:t>‹#›</a:t>
             </a:fld>
@@ -5003,7 +5823,7 @@
     </p:spTree>
     <p:extLst>
       <p:ext uri="{BB962C8B-B14F-4D97-AF65-F5344CB8AC3E}">
-        <p14:creationId xmlns:p14="http://schemas.microsoft.com/office/powerpoint/2010/main" val="136581142"/>
+        <p14:creationId xmlns:p14="http://schemas.microsoft.com/office/powerpoint/2010/main" val="3591230991"/>
       </p:ext>
     </p:extLst>
   </p:cSld>
@@ -5035,7 +5855,7 @@
           <p:cNvPr id="2" name="标题 1">
             <a:extLst>
               <a:ext uri="{FF2B5EF4-FFF2-40B4-BE49-F238E27FC236}">
-                <a16:creationId xmlns:a16="http://schemas.microsoft.com/office/drawing/2014/main" id="{F82EFA89-8089-A01A-CA03-7EB6E3791A3D}"/>
+                <a16:creationId xmlns:a16="http://schemas.microsoft.com/office/drawing/2014/main" id="{11D811CE-0AC6-E0D7-C07F-30D52137EB27}"/>
               </a:ext>
             </a:extLst>
           </p:cNvPr>
@@ -5072,7 +5892,7 @@
           <p:cNvPr id="3" name="图片占位符 2">
             <a:extLst>
               <a:ext uri="{FF2B5EF4-FFF2-40B4-BE49-F238E27FC236}">
-                <a16:creationId xmlns:a16="http://schemas.microsoft.com/office/drawing/2014/main" id="{A170CD92-300B-F0EC-C303-ACBE7E1A524F}"/>
+                <a16:creationId xmlns:a16="http://schemas.microsoft.com/office/drawing/2014/main" id="{D23FAE0F-ED0D-7BDE-D8BD-A896B1D98111}"/>
               </a:ext>
             </a:extLst>
           </p:cNvPr>
@@ -5139,7 +5959,7 @@
           <p:cNvPr id="4" name="文本占位符 3">
             <a:extLst>
               <a:ext uri="{FF2B5EF4-FFF2-40B4-BE49-F238E27FC236}">
-                <a16:creationId xmlns:a16="http://schemas.microsoft.com/office/drawing/2014/main" id="{5317F66E-1653-2AF3-2FAB-A59F3094F7B6}"/>
+                <a16:creationId xmlns:a16="http://schemas.microsoft.com/office/drawing/2014/main" id="{44DA235E-2E0B-103B-3E2B-7BD30B523315}"/>
               </a:ext>
             </a:extLst>
           </p:cNvPr>
@@ -5210,7 +6030,7 @@
           <p:cNvPr id="5" name="日期占位符 4">
             <a:extLst>
               <a:ext uri="{FF2B5EF4-FFF2-40B4-BE49-F238E27FC236}">
-                <a16:creationId xmlns:a16="http://schemas.microsoft.com/office/drawing/2014/main" id="{216E3672-E59C-528E-FF10-20DDA43DDAC5}"/>
+                <a16:creationId xmlns:a16="http://schemas.microsoft.com/office/drawing/2014/main" id="{FB5F2931-C913-B29D-A611-DB122F53210D}"/>
               </a:ext>
             </a:extLst>
           </p:cNvPr>
@@ -5226,7 +6046,7 @@
           <a:bodyPr/>
           <a:lstStyle/>
           <a:p>
-            <a:fld id="{4E062528-7899-4F1E-B4FB-AE19E5049ACE}" type="datetimeFigureOut">
+            <a:fld id="{FF776401-529C-4520-90C9-EC11B46F0E46}" type="datetimeFigureOut">
               <a:rPr lang="zh-CN" altLang="en-US" smtClean="0"/>
               <a:t>2026/10/14</a:t>
             </a:fld>
@@ -5239,7 +6059,7 @@
           <p:cNvPr id="6" name="页脚占位符 5">
             <a:extLst>
               <a:ext uri="{FF2B5EF4-FFF2-40B4-BE49-F238E27FC236}">
-                <a16:creationId xmlns:a16="http://schemas.microsoft.com/office/drawing/2014/main" id="{E662FB11-9E43-0CEA-C6F5-3AF6D391D2A5}"/>
+                <a16:creationId xmlns:a16="http://schemas.microsoft.com/office/drawing/2014/main" id="{0DE4E9CB-7CE8-DE38-14C8-DE3A72ABA35F}"/>
               </a:ext>
             </a:extLst>
           </p:cNvPr>
@@ -5264,7 +6084,7 @@
           <p:cNvPr id="7" name="灯片编号占位符 6">
             <a:extLst>
               <a:ext uri="{FF2B5EF4-FFF2-40B4-BE49-F238E27FC236}">
-                <a16:creationId xmlns:a16="http://schemas.microsoft.com/office/drawing/2014/main" id="{41ADD3B5-7A53-37F9-7E08-2A7F972CF860}"/>
+                <a16:creationId xmlns:a16="http://schemas.microsoft.com/office/drawing/2014/main" id="{A822641F-6457-F777-4D1C-DA4230E560F2}"/>
               </a:ext>
             </a:extLst>
           </p:cNvPr>
@@ -5280,7 +6100,7 @@
           <a:bodyPr/>
           <a:lstStyle/>
           <a:p>
-            <a:fld id="{4B81E475-45AC-43A4-AC6E-22A7646F7618}" type="slidenum">
+            <a:fld id="{B7212D74-26B5-4FE8-B9EB-895A007E4038}" type="slidenum">
               <a:rPr lang="zh-CN" altLang="en-US" smtClean="0"/>
               <a:t>‹#›</a:t>
             </a:fld>
@@ -5291,7 +6111,7 @@
     </p:spTree>
     <p:extLst>
       <p:ext uri="{BB962C8B-B14F-4D97-AF65-F5344CB8AC3E}">
-        <p14:creationId xmlns:p14="http://schemas.microsoft.com/office/powerpoint/2010/main" val="1328447493"/>
+        <p14:creationId xmlns:p14="http://schemas.microsoft.com/office/powerpoint/2010/main" val="3730657228"/>
       </p:ext>
     </p:extLst>
   </p:cSld>
@@ -5328,7 +6148,7 @@
           <p:cNvPr id="2" name="标题占位符 1">
             <a:extLst>
               <a:ext uri="{FF2B5EF4-FFF2-40B4-BE49-F238E27FC236}">
-                <a16:creationId xmlns:a16="http://schemas.microsoft.com/office/drawing/2014/main" id="{37081F67-91ED-9F2F-547A-7B2F12C0F3E4}"/>
+                <a16:creationId xmlns:a16="http://schemas.microsoft.com/office/drawing/2014/main" id="{548CC314-93E2-F2AC-8A93-5BBC4C5047D4}"/>
               </a:ext>
             </a:extLst>
           </p:cNvPr>
@@ -5366,7 +6186,7 @@
           <p:cNvPr id="3" name="文本占位符 2">
             <a:extLst>
               <a:ext uri="{FF2B5EF4-FFF2-40B4-BE49-F238E27FC236}">
-                <a16:creationId xmlns:a16="http://schemas.microsoft.com/office/drawing/2014/main" id="{8B1A8A1E-9D55-2A92-D147-EAE8C07783F1}"/>
+                <a16:creationId xmlns:a16="http://schemas.microsoft.com/office/drawing/2014/main" id="{2AD77D6F-24EE-2305-31BE-0265408E7872}"/>
               </a:ext>
             </a:extLst>
           </p:cNvPr>
@@ -5433,7 +6253,7 @@
           <p:cNvPr id="4" name="日期占位符 3">
             <a:extLst>
               <a:ext uri="{FF2B5EF4-FFF2-40B4-BE49-F238E27FC236}">
-                <a16:creationId xmlns:a16="http://schemas.microsoft.com/office/drawing/2014/main" id="{B4464DDA-03B1-8DC6-E2ED-87A3635401B6}"/>
+                <a16:creationId xmlns:a16="http://schemas.microsoft.com/office/drawing/2014/main" id="{3E06BFC5-21BD-29A3-78ED-8F0AB3FEFD76}"/>
               </a:ext>
             </a:extLst>
           </p:cNvPr>
@@ -5467,7 +6287,7 @@
             </a:lvl1pPr>
           </a:lstStyle>
           <a:p>
-            <a:fld id="{4E062528-7899-4F1E-B4FB-AE19E5049ACE}" type="datetimeFigureOut">
+            <a:fld id="{FF776401-529C-4520-90C9-EC11B46F0E46}" type="datetimeFigureOut">
               <a:rPr lang="zh-CN" altLang="en-US" smtClean="0"/>
               <a:t>2026/10/14</a:t>
             </a:fld>
@@ -5480,7 +6300,7 @@
           <p:cNvPr id="5" name="页脚占位符 4">
             <a:extLst>
               <a:ext uri="{FF2B5EF4-FFF2-40B4-BE49-F238E27FC236}">
-                <a16:creationId xmlns:a16="http://schemas.microsoft.com/office/drawing/2014/main" id="{5587B184-BFD4-EB63-E9D3-75A6D162447F}"/>
+                <a16:creationId xmlns:a16="http://schemas.microsoft.com/office/drawing/2014/main" id="{6DC6AB89-FD6D-1A68-5491-D9521772159A}"/>
               </a:ext>
             </a:extLst>
           </p:cNvPr>
@@ -5523,7 +6343,7 @@
           <p:cNvPr id="6" name="灯片编号占位符 5">
             <a:extLst>
               <a:ext uri="{FF2B5EF4-FFF2-40B4-BE49-F238E27FC236}">
-                <a16:creationId xmlns:a16="http://schemas.microsoft.com/office/drawing/2014/main" id="{01823636-730B-2DB9-1246-5F5387B7DACA}"/>
+                <a16:creationId xmlns:a16="http://schemas.microsoft.com/office/drawing/2014/main" id="{83E0DCBB-57FB-B9E4-6DD5-78D3DC0229F2}"/>
               </a:ext>
             </a:extLst>
           </p:cNvPr>
@@ -5557,7 +6377,7 @@
             </a:lvl1pPr>
           </a:lstStyle>
           <a:p>
-            <a:fld id="{4B81E475-45AC-43A4-AC6E-22A7646F7618}" type="slidenum">
+            <a:fld id="{B7212D74-26B5-4FE8-B9EB-895A007E4038}" type="slidenum">
               <a:rPr lang="zh-CN" altLang="en-US" smtClean="0"/>
               <a:t>‹#›</a:t>
             </a:fld>
@@ -5568,7 +6388,7 @@
     </p:spTree>
     <p:extLst>
       <p:ext uri="{BB962C8B-B14F-4D97-AF65-F5344CB8AC3E}">
-        <p14:creationId xmlns:p14="http://schemas.microsoft.com/office/powerpoint/2010/main" val="798058117"/>
+        <p14:creationId xmlns:p14="http://schemas.microsoft.com/office/powerpoint/2010/main" val="884035847"/>
       </p:ext>
     </p:extLst>
   </p:cSld>
@@ -5891,7 +6711,7 @@
           <p:cNvPr id="2" name="图表 1">
             <a:extLst>
               <a:ext uri="{FF2B5EF4-FFF2-40B4-BE49-F238E27FC236}">
-                <a16:creationId xmlns:a16="http://schemas.microsoft.com/office/drawing/2014/main" id="{DDB6294A-4E0F-9CE4-2CBD-4D26FFE5EA5F}"/>
+                <a16:creationId xmlns:a16="http://schemas.microsoft.com/office/drawing/2014/main" id="{C01D0BBD-240B-5F77-66ED-E617D17A78A1}"/>
               </a:ext>
             </a:extLst>
           </p:cNvPr>
@@ -5899,7 +6719,7 @@
           <p:nvPr>
             <p:extLst>
               <p:ext uri="{D42A27DB-BD31-4B8C-83A1-F6EECF244321}">
-                <p14:modId xmlns:p14="http://schemas.microsoft.com/office/powerpoint/2010/main" val="2390664698"/>
+                <p14:modId xmlns:p14="http://schemas.microsoft.com/office/powerpoint/2010/main" val="336196451"/>
               </p:ext>
             </p:extLst>
           </p:nvPr>
@@ -5919,7 +6739,7 @@
           <p:cNvPr id="3" name="图表 2">
             <a:extLst>
               <a:ext uri="{FF2B5EF4-FFF2-40B4-BE49-F238E27FC236}">
-                <a16:creationId xmlns:a16="http://schemas.microsoft.com/office/drawing/2014/main" id="{B1544483-28BF-E1DF-6ECD-1CB707A0BCAF}"/>
+                <a16:creationId xmlns:a16="http://schemas.microsoft.com/office/drawing/2014/main" id="{91C32953-BF19-918F-2814-CC5DAE18E266}"/>
               </a:ext>
             </a:extLst>
           </p:cNvPr>
@@ -5927,7 +6747,7 @@
           <p:nvPr>
             <p:extLst>
               <p:ext uri="{D42A27DB-BD31-4B8C-83A1-F6EECF244321}">
-                <p14:modId xmlns:p14="http://schemas.microsoft.com/office/powerpoint/2010/main" val="4027777427"/>
+                <p14:modId xmlns:p14="http://schemas.microsoft.com/office/powerpoint/2010/main" val="1490823048"/>
               </p:ext>
             </p:extLst>
           </p:nvPr>
@@ -5945,7 +6765,7 @@
     </p:spTree>
     <p:extLst>
       <p:ext uri="{BB962C8B-B14F-4D97-AF65-F5344CB8AC3E}">
-        <p14:creationId xmlns:p14="http://schemas.microsoft.com/office/powerpoint/2010/main" val="1320164186"/>
+        <p14:creationId xmlns:p14="http://schemas.microsoft.com/office/powerpoint/2010/main" val="1291855357"/>
       </p:ext>
     </p:extLst>
   </p:cSld>
@@ -5977,7 +6797,7 @@
           <p:cNvPr id="2" name="图表 1">
             <a:extLst>
               <a:ext uri="{FF2B5EF4-FFF2-40B4-BE49-F238E27FC236}">
-                <a16:creationId xmlns:a16="http://schemas.microsoft.com/office/drawing/2014/main" id="{8F639D0E-D1EC-C033-DF29-42C8BA24E314}"/>
+                <a16:creationId xmlns:a16="http://schemas.microsoft.com/office/drawing/2014/main" id="{E2F03DAA-6E0C-A894-F20D-DD3AFE043F3B}"/>
               </a:ext>
             </a:extLst>
           </p:cNvPr>
@@ -5985,7 +6805,7 @@
           <p:nvPr>
             <p:extLst>
               <p:ext uri="{D42A27DB-BD31-4B8C-83A1-F6EECF244321}">
-                <p14:modId xmlns:p14="http://schemas.microsoft.com/office/powerpoint/2010/main" val="442123622"/>
+                <p14:modId xmlns:p14="http://schemas.microsoft.com/office/powerpoint/2010/main" val="3961041221"/>
               </p:ext>
             </p:extLst>
           </p:nvPr>
@@ -6000,10 +6820,38 @@
           </a:graphicData>
         </a:graphic>
       </p:graphicFrame>
+      <p:graphicFrame>
+        <p:nvGraphicFramePr>
+          <p:cNvPr id="3" name="图表 2">
+            <a:extLst>
+              <a:ext uri="{FF2B5EF4-FFF2-40B4-BE49-F238E27FC236}">
+                <a16:creationId xmlns:a16="http://schemas.microsoft.com/office/drawing/2014/main" id="{48FBA57C-0B47-6985-7A76-FD3A8F56E53F}"/>
+              </a:ext>
+            </a:extLst>
+          </p:cNvPr>
+          <p:cNvGraphicFramePr/>
+          <p:nvPr>
+            <p:extLst>
+              <p:ext uri="{D42A27DB-BD31-4B8C-83A1-F6EECF244321}">
+                <p14:modId xmlns:p14="http://schemas.microsoft.com/office/powerpoint/2010/main" val="1583755597"/>
+              </p:ext>
+            </p:extLst>
+          </p:nvPr>
+        </p:nvGraphicFramePr>
+        <p:xfrm>
+          <a:off x="6223000" y="508000"/>
+          <a:ext cx="5715000" cy="5588000"/>
+        </p:xfrm>
+        <a:graphic>
+          <a:graphicData uri="http://schemas.openxmlformats.org/drawingml/2006/chart">
+            <c:chart xmlns:c="http://schemas.openxmlformats.org/drawingml/2006/chart" xmlns:r="http://schemas.openxmlformats.org/officeDocument/2006/relationships" r:id="rId3"/>
+          </a:graphicData>
+        </a:graphic>
+      </p:graphicFrame>
     </p:spTree>
     <p:extLst>
       <p:ext uri="{BB962C8B-B14F-4D97-AF65-F5344CB8AC3E}">
-        <p14:creationId xmlns:p14="http://schemas.microsoft.com/office/powerpoint/2010/main" val="3126565256"/>
+        <p14:creationId xmlns:p14="http://schemas.microsoft.com/office/powerpoint/2010/main" val="1037581913"/>
       </p:ext>
     </p:extLst>
   </p:cSld>
